--- a/Chapter One 1448/IT 611_Advanced Information Systems Analysis and Design/Lectute Slides/hoffer_msad6e_ch03_updated.pptx
+++ b/Chapter One 1448/IT 611_Advanced Information Systems Analysis and Design/Lectute Slides/hoffer_msad6e_ch03_updated.pptx
@@ -214,7 +214,7 @@
               </a:defRPr>
             </a:pPr>
             <a:r>
-              <a:rPr lang="en-US" sz="1400" b="0" i="0" u="none" strike="noStrike">
+              <a:rPr lang="en-US" sz="2000" b="0" i="0" u="none" strike="noStrike" dirty="0">
                 <a:solidFill>
                   <a:srgbClr val="1E2761"/>
                 </a:solidFill>
@@ -269,7 +269,7 @@
               <a:lstStyle/>
               <a:p>
                 <a:pPr>
-                  <a:defRPr sz="1000" b="0" i="0" u="none" strike="noStrike">
+                  <a:defRPr sz="1400" b="0" i="0" u="none" strike="noStrike">
                     <a:solidFill>
                       <a:srgbClr val="33384A"/>
                     </a:solidFill>
@@ -368,7 +368,7 @@
               <a:lstStyle/>
               <a:p>
                 <a:pPr>
-                  <a:defRPr sz="1000" b="0" i="0" u="none" strike="noStrike">
+                  <a:defRPr sz="1400" b="0" i="0" u="none" strike="noStrike">
                     <a:solidFill>
                       <a:srgbClr val="33384A"/>
                     </a:solidFill>
@@ -552,7 +552,7 @@
         <a:lstStyle/>
         <a:p>
           <a:pPr>
-            <a:defRPr sz="1100">
+            <a:defRPr sz="1400">
               <a:solidFill>
                 <a:srgbClr val="33384A"/>
               </a:solidFill>
@@ -9116,7 +9116,7 @@
               <a:buNone/>
             </a:pPr>
             <a:r>
-              <a:rPr lang="en-US" sz="1100" dirty="0">
+              <a:rPr lang="en-US" sz="1600" dirty="0">
                 <a:solidFill>
                   <a:srgbClr val="33384A"/>
                 </a:solidFill>
@@ -9126,7 +9126,7 @@
               </a:rPr>
               <a:t>Define Requirements</a:t>
             </a:r>
-            <a:endParaRPr lang="en-US" sz="1100" dirty="0"/>
+            <a:endParaRPr lang="en-US" sz="1600" dirty="0"/>
           </a:p>
         </p:txBody>
       </p:sp>
@@ -9184,7 +9184,7 @@
               <a:buNone/>
             </a:pPr>
             <a:r>
-              <a:rPr lang="en-US" sz="1100" dirty="0">
+              <a:rPr lang="en-US" sz="1600" dirty="0">
                 <a:solidFill>
                   <a:srgbClr val="33384A"/>
                 </a:solidFill>
@@ -9194,7 +9194,7 @@
               </a:rPr>
               <a:t>Design Interview Form</a:t>
             </a:r>
-            <a:endParaRPr lang="en-US" sz="1100" dirty="0"/>
+            <a:endParaRPr lang="en-US" sz="1600" dirty="0"/>
           </a:p>
         </p:txBody>
       </p:sp>
@@ -9235,8 +9235,8 @@
         </p:nvSpPr>
         <p:spPr>
           <a:xfrm>
-            <a:off x="548640" y="2798064"/>
-            <a:ext cx="2148840" cy="457200"/>
+            <a:off x="548639" y="2798064"/>
+            <a:ext cx="2226641" cy="457200"/>
           </a:xfrm>
           <a:prstGeom prst="rect">
             <a:avLst/>
@@ -9252,7 +9252,7 @@
               <a:buNone/>
             </a:pPr>
             <a:r>
-              <a:rPr lang="en-US" sz="1100" dirty="0">
+              <a:rPr lang="en-US" sz="1600" dirty="0">
                 <a:solidFill>
                   <a:srgbClr val="33384A"/>
                 </a:solidFill>
@@ -9262,7 +9262,7 @@
               </a:rPr>
               <a:t>Schedule Appointments</a:t>
             </a:r>
-            <a:endParaRPr lang="en-US" sz="1100" dirty="0"/>
+            <a:endParaRPr lang="en-US" sz="1600" dirty="0"/>
           </a:p>
         </p:txBody>
       </p:sp>
@@ -9320,7 +9320,7 @@
               <a:buNone/>
             </a:pPr>
             <a:r>
-              <a:rPr lang="en-US" sz="1100" dirty="0">
+              <a:rPr lang="en-US" sz="1600" dirty="0">
                 <a:solidFill>
                   <a:srgbClr val="33384A"/>
                 </a:solidFill>
@@ -9330,7 +9330,7 @@
               </a:rPr>
               <a:t>Conduct Interviews</a:t>
             </a:r>
-            <a:endParaRPr lang="en-US" sz="1100" dirty="0"/>
+            <a:endParaRPr lang="en-US" sz="1600" dirty="0"/>
           </a:p>
         </p:txBody>
       </p:sp>
@@ -9388,7 +9388,7 @@
               <a:buNone/>
             </a:pPr>
             <a:r>
-              <a:rPr lang="en-US" sz="1100" dirty="0">
+              <a:rPr lang="en-US" sz="1600" dirty="0">
                 <a:solidFill>
                   <a:srgbClr val="33384A"/>
                 </a:solidFill>
@@ -9398,7 +9398,7 @@
               </a:rPr>
               <a:t>Review Current Reports</a:t>
             </a:r>
-            <a:endParaRPr lang="en-US" sz="1100" dirty="0"/>
+            <a:endParaRPr lang="en-US" sz="1600" dirty="0"/>
           </a:p>
         </p:txBody>
       </p:sp>
@@ -9456,7 +9456,7 @@
               <a:buNone/>
             </a:pPr>
             <a:r>
-              <a:rPr lang="en-US" sz="1100" dirty="0">
+              <a:rPr lang="en-US" sz="1600" dirty="0">
                 <a:solidFill>
                   <a:srgbClr val="33384A"/>
                 </a:solidFill>
@@ -9466,7 +9466,7 @@
               </a:rPr>
               <a:t>Collect Reports</a:t>
             </a:r>
-            <a:endParaRPr lang="en-US" sz="1100" dirty="0"/>
+            <a:endParaRPr lang="en-US" sz="1600" dirty="0"/>
           </a:p>
         </p:txBody>
       </p:sp>
@@ -9524,7 +9524,7 @@
               <a:buNone/>
             </a:pPr>
             <a:r>
-              <a:rPr lang="en-US" sz="1100" dirty="0">
+              <a:rPr lang="en-US" sz="1600" dirty="0">
                 <a:solidFill>
                   <a:srgbClr val="33384A"/>
                 </a:solidFill>
@@ -9534,7 +9534,7 @@
               </a:rPr>
               <a:t>Summarize Results</a:t>
             </a:r>
-            <a:endParaRPr lang="en-US" sz="1100" dirty="0"/>
+            <a:endParaRPr lang="en-US" sz="1600" dirty="0"/>
           </a:p>
         </p:txBody>
       </p:sp>
@@ -9592,7 +9592,7 @@
               <a:buNone/>
             </a:pPr>
             <a:r>
-              <a:rPr lang="en-US" sz="1250" i="1" dirty="0">
+              <a:rPr lang="en-US" i="1" dirty="0">
                 <a:solidFill>
                   <a:srgbClr val="6B7A99"/>
                 </a:solidFill>
@@ -9602,7 +9602,7 @@
               </a:rPr>
               <a:t>Gantt chart showing project tasks, their durations, and how they overlap on a shared timeline (in days).</a:t>
             </a:r>
-            <a:endParaRPr lang="en-US" sz="1250" dirty="0"/>
+            <a:endParaRPr lang="en-US" dirty="0"/>
           </a:p>
         </p:txBody>
       </p:sp>
@@ -9631,7 +9631,7 @@
               <a:buNone/>
             </a:pPr>
             <a:r>
-              <a:rPr lang="en-US" sz="1250" b="1" dirty="0">
+              <a:rPr lang="en-US" b="1" dirty="0">
                 <a:solidFill>
                   <a:srgbClr val="1E2761"/>
                 </a:solidFill>
@@ -9641,7 +9641,7 @@
               </a:rPr>
               <a:t>Special-purpose project management software is available for this.</a:t>
             </a:r>
-            <a:endParaRPr lang="en-US" sz="1250" dirty="0"/>
+            <a:endParaRPr lang="en-US" dirty="0"/>
           </a:p>
         </p:txBody>
       </p:sp>
@@ -10061,7 +10061,7 @@
               <a:buNone/>
             </a:pPr>
             <a:r>
-              <a:rPr lang="en-US" sz="950" b="1" dirty="0">
+              <a:rPr lang="en-US" sz="1200" b="1" dirty="0">
                 <a:solidFill>
                   <a:srgbClr val="FFFFFF"/>
                 </a:solidFill>
@@ -10071,7 +10071,7 @@
               </a:rPr>
               <a:t>Define</a:t>
             </a:r>
-            <a:endParaRPr lang="en-US" sz="950" dirty="0"/>
+            <a:endParaRPr lang="en-US" sz="1200" dirty="0"/>
           </a:p>
           <a:p>
             <a:pPr marL="0" indent="0" algn="ctr">
@@ -10081,7 +10081,7 @@
               <a:buNone/>
             </a:pPr>
             <a:r>
-              <a:rPr lang="en-US" sz="950" b="1" dirty="0">
+              <a:rPr lang="en-US" sz="1200" b="1" dirty="0">
                 <a:solidFill>
                   <a:srgbClr val="FFFFFF"/>
                 </a:solidFill>
@@ -10091,7 +10091,7 @@
               </a:rPr>
               <a:t>Requirements</a:t>
             </a:r>
-            <a:endParaRPr lang="en-US" sz="950" dirty="0"/>
+            <a:endParaRPr lang="en-US" sz="1200" dirty="0"/>
           </a:p>
         </p:txBody>
       </p:sp>
@@ -10152,7 +10152,7 @@
               <a:buNone/>
             </a:pPr>
             <a:r>
-              <a:rPr lang="en-US" sz="950" b="1" dirty="0">
+              <a:rPr lang="en-US" sz="1100" b="1" dirty="0">
                 <a:solidFill>
                   <a:srgbClr val="FFFFFF"/>
                 </a:solidFill>
@@ -10162,7 +10162,7 @@
               </a:rPr>
               <a:t>Design</a:t>
             </a:r>
-            <a:endParaRPr lang="en-US" sz="950" dirty="0"/>
+            <a:endParaRPr lang="en-US" sz="1100" dirty="0"/>
           </a:p>
           <a:p>
             <a:pPr marL="0" indent="0" algn="ctr">
@@ -10172,7 +10172,7 @@
               <a:buNone/>
             </a:pPr>
             <a:r>
-              <a:rPr lang="en-US" sz="950" b="1" dirty="0">
+              <a:rPr lang="en-US" sz="1100" b="1" dirty="0">
                 <a:solidFill>
                   <a:srgbClr val="FFFFFF"/>
                 </a:solidFill>
@@ -10182,7 +10182,7 @@
               </a:rPr>
               <a:t>Interview Form</a:t>
             </a:r>
-            <a:endParaRPr lang="en-US" sz="950" dirty="0"/>
+            <a:endParaRPr lang="en-US" sz="1100" dirty="0"/>
           </a:p>
         </p:txBody>
       </p:sp>
@@ -10243,7 +10243,7 @@
               <a:buNone/>
             </a:pPr>
             <a:r>
-              <a:rPr lang="en-US" sz="950" b="1" dirty="0">
+              <a:rPr lang="en-US" sz="1200" b="1" dirty="0">
                 <a:solidFill>
                   <a:srgbClr val="FFFFFF"/>
                 </a:solidFill>
@@ -10253,7 +10253,7 @@
               </a:rPr>
               <a:t>Review</a:t>
             </a:r>
-            <a:endParaRPr lang="en-US" sz="950" dirty="0"/>
+            <a:endParaRPr lang="en-US" sz="1200" dirty="0"/>
           </a:p>
           <a:p>
             <a:pPr marL="0" indent="0" algn="ctr">
@@ -10263,7 +10263,7 @@
               <a:buNone/>
             </a:pPr>
             <a:r>
-              <a:rPr lang="en-US" sz="950" b="1" dirty="0">
+              <a:rPr lang="en-US" sz="1200" b="1" dirty="0">
                 <a:solidFill>
                   <a:srgbClr val="FFFFFF"/>
                 </a:solidFill>
@@ -10273,7 +10273,7 @@
               </a:rPr>
               <a:t>Reports</a:t>
             </a:r>
-            <a:endParaRPr lang="en-US" sz="950" dirty="0"/>
+            <a:endParaRPr lang="en-US" sz="1200" dirty="0"/>
           </a:p>
         </p:txBody>
       </p:sp>
@@ -10334,7 +10334,7 @@
               <a:buNone/>
             </a:pPr>
             <a:r>
-              <a:rPr lang="en-US" sz="950" b="1" dirty="0">
+              <a:rPr lang="en-US" sz="1100" b="1" dirty="0">
                 <a:solidFill>
                   <a:srgbClr val="FFFFFF"/>
                 </a:solidFill>
@@ -10344,7 +10344,7 @@
               </a:rPr>
               <a:t>Schedule</a:t>
             </a:r>
-            <a:endParaRPr lang="en-US" sz="950" dirty="0"/>
+            <a:endParaRPr lang="en-US" sz="1100" dirty="0"/>
           </a:p>
           <a:p>
             <a:pPr marL="0" indent="0" algn="ctr">
@@ -10354,7 +10354,7 @@
               <a:buNone/>
             </a:pPr>
             <a:r>
-              <a:rPr lang="en-US" sz="950" b="1" dirty="0">
+              <a:rPr lang="en-US" sz="1100" b="1" dirty="0">
                 <a:solidFill>
                   <a:srgbClr val="FFFFFF"/>
                 </a:solidFill>
@@ -10364,7 +10364,7 @@
               </a:rPr>
               <a:t>Appointments</a:t>
             </a:r>
-            <a:endParaRPr lang="en-US" sz="950" dirty="0"/>
+            <a:endParaRPr lang="en-US" sz="1100" dirty="0"/>
           </a:p>
         </p:txBody>
       </p:sp>
@@ -10425,7 +10425,7 @@
               <a:buNone/>
             </a:pPr>
             <a:r>
-              <a:rPr lang="en-US" sz="950" b="1" dirty="0">
+              <a:rPr lang="en-US" sz="1200" b="1" dirty="0">
                 <a:solidFill>
                   <a:srgbClr val="FFFFFF"/>
                 </a:solidFill>
@@ -10435,7 +10435,7 @@
               </a:rPr>
               <a:t>Collect</a:t>
             </a:r>
-            <a:endParaRPr lang="en-US" sz="950" dirty="0"/>
+            <a:endParaRPr lang="en-US" sz="1200" dirty="0"/>
           </a:p>
           <a:p>
             <a:pPr marL="0" indent="0" algn="ctr">
@@ -10445,7 +10445,7 @@
               <a:buNone/>
             </a:pPr>
             <a:r>
-              <a:rPr lang="en-US" sz="950" b="1" dirty="0">
+              <a:rPr lang="en-US" sz="1200" b="1" dirty="0">
                 <a:solidFill>
                   <a:srgbClr val="FFFFFF"/>
                 </a:solidFill>
@@ -10455,7 +10455,7 @@
               </a:rPr>
               <a:t>Reports</a:t>
             </a:r>
-            <a:endParaRPr lang="en-US" sz="950" dirty="0"/>
+            <a:endParaRPr lang="en-US" sz="1200" dirty="0"/>
           </a:p>
         </p:txBody>
       </p:sp>
@@ -10516,7 +10516,7 @@
               <a:buNone/>
             </a:pPr>
             <a:r>
-              <a:rPr lang="en-US" sz="950" b="1" dirty="0">
+              <a:rPr lang="en-US" sz="1200" b="1" dirty="0">
                 <a:solidFill>
                   <a:srgbClr val="FFFFFF"/>
                 </a:solidFill>
@@ -10526,7 +10526,7 @@
               </a:rPr>
               <a:t>Conduct</a:t>
             </a:r>
-            <a:endParaRPr lang="en-US" sz="950" dirty="0"/>
+            <a:endParaRPr lang="en-US" sz="1200" dirty="0"/>
           </a:p>
           <a:p>
             <a:pPr marL="0" indent="0" algn="ctr">
@@ -10536,7 +10536,7 @@
               <a:buNone/>
             </a:pPr>
             <a:r>
-              <a:rPr lang="en-US" sz="950" b="1" dirty="0">
+              <a:rPr lang="en-US" sz="1200" b="1" dirty="0">
                 <a:solidFill>
                   <a:srgbClr val="FFFFFF"/>
                 </a:solidFill>
@@ -10546,7 +10546,7 @@
               </a:rPr>
               <a:t>Interviews</a:t>
             </a:r>
-            <a:endParaRPr lang="en-US" sz="950" dirty="0"/>
+            <a:endParaRPr lang="en-US" sz="1200" dirty="0"/>
           </a:p>
         </p:txBody>
       </p:sp>
@@ -10607,7 +10607,7 @@
               <a:buNone/>
             </a:pPr>
             <a:r>
-              <a:rPr lang="en-US" sz="950" b="1" dirty="0">
+              <a:rPr lang="en-US" sz="1200" b="1" dirty="0">
                 <a:solidFill>
                   <a:srgbClr val="FFFFFF"/>
                 </a:solidFill>
@@ -10617,7 +10617,7 @@
               </a:rPr>
               <a:t>Summarize</a:t>
             </a:r>
-            <a:endParaRPr lang="en-US" sz="950" dirty="0"/>
+            <a:endParaRPr lang="en-US" sz="1200" dirty="0"/>
           </a:p>
           <a:p>
             <a:pPr marL="0" indent="0" algn="ctr">
@@ -10627,7 +10627,7 @@
               <a:buNone/>
             </a:pPr>
             <a:r>
-              <a:rPr lang="en-US" sz="950" b="1" dirty="0">
+              <a:rPr lang="en-US" sz="1200" b="1" dirty="0">
                 <a:solidFill>
                   <a:srgbClr val="FFFFFF"/>
                 </a:solidFill>
@@ -10637,7 +10637,7 @@
               </a:rPr>
               <a:t>Results</a:t>
             </a:r>
-            <a:endParaRPr lang="en-US" sz="950" dirty="0"/>
+            <a:endParaRPr lang="en-US" sz="1200" dirty="0"/>
           </a:p>
         </p:txBody>
       </p:sp>
@@ -10698,7 +10698,7 @@
               <a:buNone/>
             </a:pPr>
             <a:r>
-              <a:rPr lang="en-US" sz="950" b="1" dirty="0">
+              <a:rPr lang="en-US" sz="1400" b="1" dirty="0">
                 <a:solidFill>
                   <a:srgbClr val="FFFFFF"/>
                 </a:solidFill>
@@ -10708,7 +10708,7 @@
               </a:rPr>
               <a:t>Deliver</a:t>
             </a:r>
-            <a:endParaRPr lang="en-US" sz="950" dirty="0"/>
+            <a:endParaRPr lang="en-US" sz="1400" dirty="0"/>
           </a:p>
           <a:p>
             <a:pPr marL="0" indent="0" algn="ctr">
@@ -10718,7 +10718,7 @@
               <a:buNone/>
             </a:pPr>
             <a:r>
-              <a:rPr lang="en-US" sz="950" b="1" dirty="0">
+              <a:rPr lang="en-US" sz="1400" b="1" dirty="0">
                 <a:solidFill>
                   <a:srgbClr val="FFFFFF"/>
                 </a:solidFill>
@@ -10728,7 +10728,7 @@
               </a:rPr>
               <a:t>Findings</a:t>
             </a:r>
-            <a:endParaRPr lang="en-US" sz="950" dirty="0"/>
+            <a:endParaRPr lang="en-US" sz="1400" dirty="0"/>
           </a:p>
         </p:txBody>
       </p:sp>
@@ -10757,7 +10757,7 @@
               <a:buNone/>
             </a:pPr>
             <a:r>
-              <a:rPr lang="en-US" sz="1250" i="1" dirty="0">
+              <a:rPr lang="en-US" sz="2000" i="1" dirty="0">
                 <a:solidFill>
                   <a:srgbClr val="6B7A99"/>
                 </a:solidFill>
@@ -10767,7 +10767,7 @@
               </a:rPr>
               <a:t>Rectangles represent tasks; arrows show the sequence and dependencies between them.</a:t>
             </a:r>
-            <a:endParaRPr lang="en-US" sz="1250" dirty="0"/>
+            <a:endParaRPr lang="en-US" sz="2000" dirty="0"/>
           </a:p>
         </p:txBody>
       </p:sp>
@@ -10796,7 +10796,7 @@
               <a:buNone/>
             </a:pPr>
             <a:r>
-              <a:rPr lang="en-US" sz="1250" b="1" dirty="0">
+              <a:rPr lang="en-US" sz="2000" b="1" dirty="0">
                 <a:solidFill>
                   <a:srgbClr val="1E2761"/>
                 </a:solidFill>
@@ -10806,7 +10806,7 @@
               </a:rPr>
               <a:t>Special-purpose project management software is available for this.</a:t>
             </a:r>
-            <a:endParaRPr lang="en-US" sz="1250" dirty="0"/>
+            <a:endParaRPr lang="en-US" sz="2000" dirty="0"/>
           </a:p>
         </p:txBody>
       </p:sp>
@@ -10846,45 +10846,6 @@
               <a:t>18</a:t>
             </a:r>
             <a:endParaRPr lang="en-US" sz="1000" dirty="0"/>
-          </a:p>
-        </p:txBody>
-      </p:sp>
-      <p:sp>
-        <p:nvSpPr>
-          <p:cNvPr id="31" name="Text 29"/>
-          <p:cNvSpPr/>
-          <p:nvPr/>
-        </p:nvSpPr>
-        <p:spPr>
-          <a:xfrm>
-            <a:off x="548640" y="6400800"/>
-            <a:ext cx="6400800" cy="274320"/>
-          </a:xfrm>
-          <a:prstGeom prst="rect">
-            <a:avLst/>
-          </a:prstGeom>
-          <a:noFill/>
-          <a:ln/>
-        </p:spPr>
-        <p:txBody>
-          <a:bodyPr wrap="square" rtlCol="0" anchor="ctr"/>
-          <a:lstStyle/>
-          <a:p>
-            <a:pPr marL="0" indent="0">
-              <a:buNone/>
-            </a:pPr>
-            <a:r>
-              <a:rPr lang="en-US" sz="900" dirty="0">
-                <a:solidFill>
-                  <a:srgbClr val="6B7A99"/>
-                </a:solidFill>
-                <a:latin typeface="Calibri" pitchFamily="34" charset="0"/>
-                <a:ea typeface="Calibri" pitchFamily="34" charset="-122"/>
-                <a:cs typeface="Calibri" pitchFamily="34" charset="-120"/>
-              </a:rPr>
-              <a:t>Ch. 3 — Managing the Information Systems Project</a:t>
-            </a:r>
-            <a:endParaRPr lang="en-US" sz="900" dirty="0"/>
           </a:p>
         </p:txBody>
       </p:sp>
@@ -11003,7 +10964,13 @@
         <p:nvGraphicFramePr>
           <p:cNvPr id="4" name="Chart 0"/>
           <p:cNvGraphicFramePr/>
-          <p:nvPr/>
+          <p:nvPr>
+            <p:extLst>
+              <p:ext uri="{D42A27DB-BD31-4B8C-83A1-F6EECF244321}">
+                <p14:modId xmlns:p14="http://schemas.microsoft.com/office/powerpoint/2010/main" val="2343776791"/>
+              </p:ext>
+            </p:extLst>
+          </p:nvPr>
         </p:nvGraphicFramePr>
         <p:xfrm>
           <a:off x="822960" y="1883664"/>
@@ -11040,7 +11007,7 @@
               <a:buNone/>
             </a:pPr>
             <a:r>
-              <a:rPr lang="en-US" sz="1250" i="1" dirty="0">
+              <a:rPr lang="en-US" i="1" dirty="0">
                 <a:solidFill>
                   <a:srgbClr val="6B7A99"/>
                 </a:solidFill>
@@ -11050,7 +11017,7 @@
               </a:rPr>
               <a:t>A financial cost-and-benefit analysis for a systems development project. Spreadsheet software is well suited to this.</a:t>
             </a:r>
-            <a:endParaRPr lang="en-US" sz="1250" dirty="0"/>
+            <a:endParaRPr lang="en-US" dirty="0"/>
           </a:p>
         </p:txBody>
       </p:sp>
@@ -11090,45 +11057,6 @@
               <a:t>19</a:t>
             </a:r>
             <a:endParaRPr lang="en-US" sz="1000" dirty="0"/>
-          </a:p>
-        </p:txBody>
-      </p:sp>
-      <p:sp>
-        <p:nvSpPr>
-          <p:cNvPr id="7" name="Text 4"/>
-          <p:cNvSpPr/>
-          <p:nvPr/>
-        </p:nvSpPr>
-        <p:spPr>
-          <a:xfrm>
-            <a:off x="548640" y="6400800"/>
-            <a:ext cx="6400800" cy="274320"/>
-          </a:xfrm>
-          <a:prstGeom prst="rect">
-            <a:avLst/>
-          </a:prstGeom>
-          <a:noFill/>
-          <a:ln/>
-        </p:spPr>
-        <p:txBody>
-          <a:bodyPr wrap="square" rtlCol="0" anchor="ctr"/>
-          <a:lstStyle/>
-          <a:p>
-            <a:pPr marL="0" indent="0">
-              <a:buNone/>
-            </a:pPr>
-            <a:r>
-              <a:rPr lang="en-US" sz="900" dirty="0">
-                <a:solidFill>
-                  <a:srgbClr val="6B7A99"/>
-                </a:solidFill>
-                <a:latin typeface="Calibri" pitchFamily="34" charset="0"/>
-                <a:ea typeface="Calibri" pitchFamily="34" charset="-122"/>
-                <a:cs typeface="Calibri" pitchFamily="34" charset="-120"/>
-              </a:rPr>
-              <a:t>Ch. 3 — Managing the Information Systems Project</a:t>
-            </a:r>
-            <a:endParaRPr lang="en-US" sz="900" dirty="0"/>
           </a:p>
         </p:txBody>
       </p:sp>
@@ -11268,7 +11196,7 @@
               <a:buNone/>
             </a:pPr>
             <a:r>
-              <a:rPr lang="en-US" sz="1500" i="1" dirty="0">
+              <a:rPr lang="en-US" sz="2000" i="1" dirty="0">
                 <a:solidFill>
                   <a:srgbClr val="1E2761"/>
                 </a:solidFill>
@@ -11278,7 +11206,7 @@
               </a:rPr>
               <a:t>Plans created in the prior phases are put into action.</a:t>
             </a:r>
-            <a:endParaRPr lang="en-US" sz="1500" dirty="0"/>
+            <a:endParaRPr lang="en-US" sz="2000" dirty="0"/>
           </a:p>
         </p:txBody>
       </p:sp>
@@ -11358,7 +11286,7 @@
               <a:buNone/>
             </a:pPr>
             <a:r>
-              <a:rPr lang="en-US" sz="1450" b="1" dirty="0">
+              <a:rPr lang="en-US" sz="2000" b="1" dirty="0">
                 <a:solidFill>
                   <a:srgbClr val="1E2761"/>
                 </a:solidFill>
@@ -11368,7 +11296,7 @@
               </a:rPr>
               <a:t>Execute the baseline project plan</a:t>
             </a:r>
-            <a:endParaRPr lang="en-US" sz="1450" dirty="0"/>
+            <a:endParaRPr lang="en-US" sz="2000" dirty="0"/>
           </a:p>
         </p:txBody>
       </p:sp>
@@ -11448,7 +11376,7 @@
               <a:buNone/>
             </a:pPr>
             <a:r>
-              <a:rPr lang="en-US" sz="1450" b="1" dirty="0">
+              <a:rPr lang="en-US" sz="2000" b="1" dirty="0">
                 <a:solidFill>
                   <a:srgbClr val="1E2761"/>
                 </a:solidFill>
@@ -11458,7 +11386,7 @@
               </a:rPr>
               <a:t>Monitor progress against the baseline</a:t>
             </a:r>
-            <a:endParaRPr lang="en-US" sz="1450" dirty="0"/>
+            <a:endParaRPr lang="en-US" sz="2000" dirty="0"/>
           </a:p>
         </p:txBody>
       </p:sp>
@@ -11538,7 +11466,7 @@
               <a:buNone/>
             </a:pPr>
             <a:r>
-              <a:rPr lang="en-US" sz="1450" b="1" dirty="0">
+              <a:rPr lang="en-US" sz="2000" b="1" dirty="0">
                 <a:solidFill>
                   <a:srgbClr val="1E2761"/>
                 </a:solidFill>
@@ -11548,7 +11476,7 @@
               </a:rPr>
               <a:t>Manage changes to the baseline plan</a:t>
             </a:r>
-            <a:endParaRPr lang="en-US" sz="1450" dirty="0"/>
+            <a:endParaRPr lang="en-US" sz="2000" dirty="0"/>
           </a:p>
         </p:txBody>
       </p:sp>
@@ -11628,7 +11556,7 @@
               <a:buNone/>
             </a:pPr>
             <a:r>
-              <a:rPr lang="en-US" sz="1450" b="1" dirty="0">
+              <a:rPr lang="en-US" sz="2000" b="1" dirty="0">
                 <a:solidFill>
                   <a:srgbClr val="1E2761"/>
                 </a:solidFill>
@@ -11638,7 +11566,7 @@
               </a:rPr>
               <a:t>Maintain the project workbook</a:t>
             </a:r>
-            <a:endParaRPr lang="en-US" sz="1450" dirty="0"/>
+            <a:endParaRPr lang="en-US" sz="2000" dirty="0"/>
           </a:p>
         </p:txBody>
       </p:sp>
@@ -11718,7 +11646,7 @@
               <a:buNone/>
             </a:pPr>
             <a:r>
-              <a:rPr lang="en-US" sz="1450" b="1" dirty="0">
+              <a:rPr lang="en-US" sz="2000" b="1" dirty="0">
                 <a:solidFill>
                   <a:srgbClr val="1E2761"/>
                 </a:solidFill>
@@ -11728,7 +11656,7 @@
               </a:rPr>
               <a:t>Communicate project status</a:t>
             </a:r>
-            <a:endParaRPr lang="en-US" sz="1450" dirty="0"/>
+            <a:endParaRPr lang="en-US" sz="2000" dirty="0"/>
           </a:p>
         </p:txBody>
       </p:sp>
@@ -11768,45 +11696,6 @@
               <a:t>20</a:t>
             </a:r>
             <a:endParaRPr lang="en-US" sz="1000" dirty="0"/>
-          </a:p>
-        </p:txBody>
-      </p:sp>
-      <p:sp>
-        <p:nvSpPr>
-          <p:cNvPr id="21" name="Text 14"/>
-          <p:cNvSpPr/>
-          <p:nvPr/>
-        </p:nvSpPr>
-        <p:spPr>
-          <a:xfrm>
-            <a:off x="548640" y="6400800"/>
-            <a:ext cx="6400800" cy="274320"/>
-          </a:xfrm>
-          <a:prstGeom prst="rect">
-            <a:avLst/>
-          </a:prstGeom>
-          <a:noFill/>
-          <a:ln/>
-        </p:spPr>
-        <p:txBody>
-          <a:bodyPr wrap="square" rtlCol="0" anchor="ctr"/>
-          <a:lstStyle/>
-          <a:p>
-            <a:pPr marL="0" indent="0">
-              <a:buNone/>
-            </a:pPr>
-            <a:r>
-              <a:rPr lang="en-US" sz="900" dirty="0">
-                <a:solidFill>
-                  <a:srgbClr val="6B7A99"/>
-                </a:solidFill>
-                <a:latin typeface="Calibri" pitchFamily="34" charset="0"/>
-                <a:ea typeface="Calibri" pitchFamily="34" charset="-122"/>
-                <a:cs typeface="Calibri" pitchFamily="34" charset="-120"/>
-              </a:rPr>
-              <a:t>Ch. 3 — Managing the Information Systems Project</a:t>
-            </a:r>
-            <a:endParaRPr lang="en-US" sz="900" dirty="0"/>
           </a:p>
         </p:txBody>
       </p:sp>
@@ -12498,7 +12387,7 @@
               <a:buNone/>
             </a:pPr>
             <a:r>
-              <a:rPr lang="en-US" sz="1100" dirty="0">
+              <a:rPr lang="en-US" sz="1600" dirty="0">
                 <a:solidFill>
                   <a:srgbClr val="33384A"/>
                 </a:solidFill>
@@ -12508,7 +12397,7 @@
               </a:rPr>
               <a:t>Define Requirements</a:t>
             </a:r>
-            <a:endParaRPr lang="en-US" sz="1100" dirty="0"/>
+            <a:endParaRPr lang="en-US" sz="1600" dirty="0"/>
           </a:p>
         </p:txBody>
       </p:sp>
@@ -12595,7 +12484,7 @@
               <a:buNone/>
             </a:pPr>
             <a:r>
-              <a:rPr lang="en-US" sz="1100" dirty="0">
+              <a:rPr lang="en-US" sz="1600" dirty="0">
                 <a:solidFill>
                   <a:srgbClr val="33384A"/>
                 </a:solidFill>
@@ -12605,7 +12494,7 @@
               </a:rPr>
               <a:t>Design Interview Form</a:t>
             </a:r>
-            <a:endParaRPr lang="en-US" sz="1100" dirty="0"/>
+            <a:endParaRPr lang="en-US" sz="1600" dirty="0"/>
           </a:p>
         </p:txBody>
       </p:sp>
@@ -12663,7 +12552,7 @@
               <a:buNone/>
             </a:pPr>
             <a:r>
-              <a:rPr lang="en-US" sz="1100" dirty="0">
+              <a:rPr lang="en-US" sz="1600" dirty="0">
                 <a:solidFill>
                   <a:srgbClr val="33384A"/>
                 </a:solidFill>
@@ -12673,7 +12562,7 @@
               </a:rPr>
               <a:t>Schedule Appointments</a:t>
             </a:r>
-            <a:endParaRPr lang="en-US" sz="1100" dirty="0"/>
+            <a:endParaRPr lang="en-US" sz="1600" dirty="0"/>
           </a:p>
         </p:txBody>
       </p:sp>
@@ -12731,7 +12620,7 @@
               <a:buNone/>
             </a:pPr>
             <a:r>
-              <a:rPr lang="en-US" sz="1100" dirty="0">
+              <a:rPr lang="en-US" sz="1600" dirty="0">
                 <a:solidFill>
                   <a:srgbClr val="33384A"/>
                 </a:solidFill>
@@ -12741,7 +12630,7 @@
               </a:rPr>
               <a:t>Conduct Interviews</a:t>
             </a:r>
-            <a:endParaRPr lang="en-US" sz="1100" dirty="0"/>
+            <a:endParaRPr lang="en-US" sz="1600" dirty="0"/>
           </a:p>
         </p:txBody>
       </p:sp>
@@ -12828,7 +12717,7 @@
               <a:buNone/>
             </a:pPr>
             <a:r>
-              <a:rPr lang="en-US" sz="1100" dirty="0">
+              <a:rPr lang="en-US" sz="1600" dirty="0">
                 <a:solidFill>
                   <a:srgbClr val="33384A"/>
                 </a:solidFill>
@@ -12838,7 +12727,7 @@
               </a:rPr>
               <a:t>Review Current Reports</a:t>
             </a:r>
-            <a:endParaRPr lang="en-US" sz="1100" dirty="0"/>
+            <a:endParaRPr lang="en-US" sz="1600" dirty="0"/>
           </a:p>
         </p:txBody>
       </p:sp>
@@ -12896,7 +12785,7 @@
               <a:buNone/>
             </a:pPr>
             <a:r>
-              <a:rPr lang="en-US" sz="1100" dirty="0">
+              <a:rPr lang="en-US" sz="1600" dirty="0">
                 <a:solidFill>
                   <a:srgbClr val="33384A"/>
                 </a:solidFill>
@@ -12906,7 +12795,7 @@
               </a:rPr>
               <a:t>Collect Reports</a:t>
             </a:r>
-            <a:endParaRPr lang="en-US" sz="1100" dirty="0"/>
+            <a:endParaRPr lang="en-US" sz="1600" dirty="0"/>
           </a:p>
         </p:txBody>
       </p:sp>
@@ -12993,7 +12882,7 @@
               <a:buNone/>
             </a:pPr>
             <a:r>
-              <a:rPr lang="en-US" sz="1100" dirty="0">
+              <a:rPr lang="en-US" sz="1600" dirty="0">
                 <a:solidFill>
                   <a:srgbClr val="33384A"/>
                 </a:solidFill>
@@ -13003,7 +12892,7 @@
               </a:rPr>
               <a:t>Summarize Results</a:t>
             </a:r>
-            <a:endParaRPr lang="en-US" sz="1100" dirty="0"/>
+            <a:endParaRPr lang="en-US" sz="1600" dirty="0"/>
           </a:p>
         </p:txBody>
       </p:sp>
@@ -13090,7 +12979,7 @@
               <a:buNone/>
             </a:pPr>
             <a:r>
-              <a:rPr lang="en-US" sz="1200" dirty="0">
+              <a:rPr lang="en-US" sz="1600" dirty="0">
                 <a:solidFill>
                   <a:srgbClr val="33384A"/>
                 </a:solidFill>
@@ -13100,7 +12989,7 @@
               </a:rPr>
               <a:t>Critical path</a:t>
             </a:r>
-            <a:endParaRPr lang="en-US" sz="1200" dirty="0"/>
+            <a:endParaRPr lang="en-US" sz="1600" dirty="0"/>
           </a:p>
         </p:txBody>
       </p:sp>
@@ -13158,7 +13047,7 @@
               <a:buNone/>
             </a:pPr>
             <a:r>
-              <a:rPr lang="en-US" sz="1200" dirty="0">
+              <a:rPr lang="en-US" sz="1600" dirty="0">
                 <a:solidFill>
                   <a:srgbClr val="33384A"/>
                 </a:solidFill>
@@ -13168,7 +13057,7 @@
               </a:rPr>
               <a:t>Percent complete</a:t>
             </a:r>
-            <a:endParaRPr lang="en-US" sz="1200" dirty="0"/>
+            <a:endParaRPr lang="en-US" sz="1600" dirty="0"/>
           </a:p>
         </p:txBody>
       </p:sp>
@@ -13208,45 +13097,6 @@
               <a:t>21</a:t>
             </a:r>
             <a:endParaRPr lang="en-US" sz="1000" dirty="0"/>
-          </a:p>
-        </p:txBody>
-      </p:sp>
-      <p:sp>
-        <p:nvSpPr>
-          <p:cNvPr id="42" name="Text 40"/>
-          <p:cNvSpPr/>
-          <p:nvPr/>
-        </p:nvSpPr>
-        <p:spPr>
-          <a:xfrm>
-            <a:off x="548640" y="6400800"/>
-            <a:ext cx="6400800" cy="274320"/>
-          </a:xfrm>
-          <a:prstGeom prst="rect">
-            <a:avLst/>
-          </a:prstGeom>
-          <a:noFill/>
-          <a:ln/>
-        </p:spPr>
-        <p:txBody>
-          <a:bodyPr wrap="square" rtlCol="0" anchor="ctr"/>
-          <a:lstStyle/>
-          <a:p>
-            <a:pPr marL="0" indent="0">
-              <a:buNone/>
-            </a:pPr>
-            <a:r>
-              <a:rPr lang="en-US" sz="900" dirty="0">
-                <a:solidFill>
-                  <a:srgbClr val="6B7A99"/>
-                </a:solidFill>
-                <a:latin typeface="Calibri" pitchFamily="34" charset="0"/>
-                <a:ea typeface="Calibri" pitchFamily="34" charset="-122"/>
-                <a:cs typeface="Calibri" pitchFamily="34" charset="-120"/>
-              </a:rPr>
-              <a:t>Ch. 3 — Managing the Information Systems Project</a:t>
-            </a:r>
-            <a:endParaRPr lang="en-US" sz="900" dirty="0"/>
           </a:p>
         </p:txBody>
       </p:sp>
@@ -13370,7 +13220,7 @@
         <p:spPr>
           <a:xfrm>
             <a:off x="3718408" y="1883664"/>
-            <a:ext cx="4754880" cy="822960"/>
+            <a:ext cx="4754880" cy="914400"/>
           </a:xfrm>
           <a:prstGeom prst="roundRect">
             <a:avLst>
@@ -13415,7 +13265,7 @@
               <a:buNone/>
             </a:pPr>
             <a:r>
-              <a:rPr lang="en-US" sz="1600" b="1" dirty="0">
+              <a:rPr lang="en-US" sz="2000" b="1" dirty="0">
                 <a:solidFill>
                   <a:srgbClr val="FFFFFF"/>
                 </a:solidFill>
@@ -13425,7 +13275,7 @@
               </a:rPr>
               <a:t>High Formality</a:t>
             </a:r>
-            <a:endParaRPr lang="en-US" sz="1600" dirty="0"/>
+            <a:endParaRPr lang="en-US" sz="2000" dirty="0"/>
           </a:p>
         </p:txBody>
       </p:sp>
@@ -13454,7 +13304,7 @@
               <a:buNone/>
             </a:pPr>
             <a:r>
-              <a:rPr lang="en-US" sz="1400" dirty="0">
+              <a:rPr lang="en-US" dirty="0">
                 <a:solidFill>
                   <a:srgbClr val="CADCFC"/>
                 </a:solidFill>
@@ -13464,7 +13314,7 @@
               </a:rPr>
               <a:t>Project workbook · Status reports · Specification documents · Meeting minutes</a:t>
             </a:r>
-            <a:endParaRPr lang="en-US" sz="1400" dirty="0"/>
+            <a:endParaRPr lang="en-US" dirty="0"/>
           </a:p>
         </p:txBody>
       </p:sp>
@@ -13522,7 +13372,7 @@
               <a:buNone/>
             </a:pPr>
             <a:r>
-              <a:rPr lang="en-US" sz="1600" b="1" dirty="0">
+              <a:rPr lang="en-US" sz="2000" b="1" dirty="0">
                 <a:solidFill>
                   <a:srgbClr val="FFFFFF"/>
                 </a:solidFill>
@@ -13532,7 +13382,7 @@
               </a:rPr>
               <a:t>Medium Formality</a:t>
             </a:r>
-            <a:endParaRPr lang="en-US" sz="1600" dirty="0"/>
+            <a:endParaRPr lang="en-US" sz="2000" dirty="0"/>
           </a:p>
         </p:txBody>
       </p:sp>
@@ -13561,7 +13411,7 @@
               <a:buNone/>
             </a:pPr>
             <a:r>
-              <a:rPr lang="en-US" sz="1400" dirty="0">
+              <a:rPr lang="en-US" dirty="0">
                 <a:solidFill>
                   <a:srgbClr val="CADCFC"/>
                 </a:solidFill>
@@ -13571,7 +13421,7 @@
               </a:rPr>
               <a:t>Meetings · Seminars &amp; workshops · Memos</a:t>
             </a:r>
-            <a:endParaRPr lang="en-US" sz="1400" dirty="0"/>
+            <a:endParaRPr lang="en-US" dirty="0"/>
           </a:p>
         </p:txBody>
       </p:sp>
@@ -13629,7 +13479,7 @@
               <a:buNone/>
             </a:pPr>
             <a:r>
-              <a:rPr lang="en-US" sz="1600" b="1" dirty="0">
+              <a:rPr lang="en-US" sz="2000" b="1" dirty="0">
                 <a:solidFill>
                   <a:srgbClr val="FFFFFF"/>
                 </a:solidFill>
@@ -13639,7 +13489,7 @@
               </a:rPr>
               <a:t>Low Formality</a:t>
             </a:r>
-            <a:endParaRPr lang="en-US" sz="1600" dirty="0"/>
+            <a:endParaRPr lang="en-US" sz="2000" dirty="0"/>
           </a:p>
         </p:txBody>
       </p:sp>
@@ -13668,7 +13518,7 @@
               <a:buNone/>
             </a:pPr>
             <a:r>
-              <a:rPr lang="en-US" sz="1400" dirty="0">
+              <a:rPr lang="en-US" dirty="0">
                 <a:solidFill>
                   <a:srgbClr val="CADCFC"/>
                 </a:solidFill>
@@ -13678,7 +13528,7 @@
               </a:rPr>
               <a:t>Bulletin boards · Brown-bag lunches · Hallway discussions</a:t>
             </a:r>
-            <a:endParaRPr lang="en-US" sz="1400" dirty="0"/>
+            <a:endParaRPr lang="en-US" dirty="0"/>
           </a:p>
         </p:txBody>
       </p:sp>
@@ -13718,45 +13568,6 @@
               <a:t>22</a:t>
             </a:r>
             <a:endParaRPr lang="en-US" sz="1000" dirty="0"/>
-          </a:p>
-        </p:txBody>
-      </p:sp>
-      <p:sp>
-        <p:nvSpPr>
-          <p:cNvPr id="14" name="Text 12"/>
-          <p:cNvSpPr/>
-          <p:nvPr/>
-        </p:nvSpPr>
-        <p:spPr>
-          <a:xfrm>
-            <a:off x="548640" y="6400800"/>
-            <a:ext cx="6400800" cy="274320"/>
-          </a:xfrm>
-          <a:prstGeom prst="rect">
-            <a:avLst/>
-          </a:prstGeom>
-          <a:noFill/>
-          <a:ln/>
-        </p:spPr>
-        <p:txBody>
-          <a:bodyPr wrap="square" rtlCol="0" anchor="ctr"/>
-          <a:lstStyle/>
-          <a:p>
-            <a:pPr marL="0" indent="0">
-              <a:buNone/>
-            </a:pPr>
-            <a:r>
-              <a:rPr lang="en-US" sz="900" dirty="0">
-                <a:solidFill>
-                  <a:srgbClr val="6B7A99"/>
-                </a:solidFill>
-                <a:latin typeface="Calibri" pitchFamily="34" charset="0"/>
-                <a:ea typeface="Calibri" pitchFamily="34" charset="-122"/>
-                <a:cs typeface="Calibri" pitchFamily="34" charset="-120"/>
-              </a:rPr>
-              <a:t>Ch. 3 — Managing the Information Systems Project</a:t>
-            </a:r>
-            <a:endParaRPr lang="en-US" sz="900" dirty="0"/>
           </a:p>
         </p:txBody>
       </p:sp>
@@ -14571,7 +14382,7 @@
               <a:buNone/>
             </a:pPr>
             <a:r>
-              <a:rPr lang="en-US" sz="1500" i="1" dirty="0">
+              <a:rPr lang="en-US" sz="2000" i="1" dirty="0">
                 <a:solidFill>
                   <a:srgbClr val="1E2761"/>
                 </a:solidFill>
@@ -14581,7 +14392,7 @@
               </a:rPr>
               <a:t>Bring the project to a formal end.</a:t>
             </a:r>
-            <a:endParaRPr lang="en-US" sz="1500" dirty="0"/>
+            <a:endParaRPr lang="en-US" sz="2000" dirty="0"/>
           </a:p>
         </p:txBody>
       </p:sp>
@@ -14661,7 +14472,7 @@
               <a:buNone/>
             </a:pPr>
             <a:r>
-              <a:rPr lang="en-US" sz="1450" b="1" dirty="0">
+              <a:rPr lang="en-US" sz="2000" b="1" dirty="0">
                 <a:solidFill>
                   <a:srgbClr val="1E2761"/>
                 </a:solidFill>
@@ -14671,7 +14482,7 @@
               </a:rPr>
               <a:t>Close down the project</a:t>
             </a:r>
-            <a:endParaRPr lang="en-US" sz="1450" dirty="0"/>
+            <a:endParaRPr lang="en-US" sz="2000" dirty="0"/>
           </a:p>
         </p:txBody>
       </p:sp>
@@ -14751,7 +14562,7 @@
               <a:buNone/>
             </a:pPr>
             <a:r>
-              <a:rPr lang="en-US" sz="1450" b="1" dirty="0">
+              <a:rPr lang="en-US" sz="2000" b="1" dirty="0">
                 <a:solidFill>
                   <a:srgbClr val="1E2761"/>
                 </a:solidFill>
@@ -14761,7 +14572,7 @@
               </a:rPr>
               <a:t>Conduct post-project reviews</a:t>
             </a:r>
-            <a:endParaRPr lang="en-US" sz="1450" dirty="0"/>
+            <a:endParaRPr lang="en-US" sz="2000" dirty="0"/>
           </a:p>
         </p:txBody>
       </p:sp>
@@ -14841,7 +14652,7 @@
               <a:buNone/>
             </a:pPr>
             <a:r>
-              <a:rPr lang="en-US" sz="1450" b="1" dirty="0">
+              <a:rPr lang="en-US" sz="2000" b="1" dirty="0">
                 <a:solidFill>
                   <a:srgbClr val="1E2761"/>
                 </a:solidFill>
@@ -14851,7 +14662,7 @@
               </a:rPr>
               <a:t>Close the customer contract</a:t>
             </a:r>
-            <a:endParaRPr lang="en-US" sz="1450" dirty="0"/>
+            <a:endParaRPr lang="en-US" sz="2000" dirty="0"/>
           </a:p>
         </p:txBody>
       </p:sp>
@@ -14891,45 +14702,6 @@
               <a:t>23</a:t>
             </a:r>
             <a:endParaRPr lang="en-US" sz="1000" dirty="0"/>
-          </a:p>
-        </p:txBody>
-      </p:sp>
-      <p:sp>
-        <p:nvSpPr>
-          <p:cNvPr id="15" name="Text 10"/>
-          <p:cNvSpPr/>
-          <p:nvPr/>
-        </p:nvSpPr>
-        <p:spPr>
-          <a:xfrm>
-            <a:off x="548640" y="6400800"/>
-            <a:ext cx="6400800" cy="274320"/>
-          </a:xfrm>
-          <a:prstGeom prst="rect">
-            <a:avLst/>
-          </a:prstGeom>
-          <a:noFill/>
-          <a:ln/>
-        </p:spPr>
-        <p:txBody>
-          <a:bodyPr wrap="square" rtlCol="0" anchor="ctr"/>
-          <a:lstStyle/>
-          <a:p>
-            <a:pPr marL="0" indent="0">
-              <a:buNone/>
-            </a:pPr>
-            <a:r>
-              <a:rPr lang="en-US" sz="900" dirty="0">
-                <a:solidFill>
-                  <a:srgbClr val="6B7A99"/>
-                </a:solidFill>
-                <a:latin typeface="Calibri" pitchFamily="34" charset="0"/>
-                <a:ea typeface="Calibri" pitchFamily="34" charset="-122"/>
-                <a:cs typeface="Calibri" pitchFamily="34" charset="-120"/>
-              </a:rPr>
-              <a:t>Ch. 3 — Managing the Information Systems Project</a:t>
-            </a:r>
-            <a:endParaRPr lang="en-US" sz="900" dirty="0"/>
           </a:p>
         </p:txBody>
       </p:sp>
@@ -15120,7 +14892,7 @@
               <a:buNone/>
             </a:pPr>
             <a:r>
-              <a:rPr lang="en-US" sz="1300" b="1" dirty="0">
+              <a:rPr lang="en-US" sz="2000" b="1" dirty="0">
                 <a:solidFill>
                   <a:srgbClr val="1E2761"/>
                 </a:solidFill>
@@ -15130,7 +14902,7 @@
               </a:rPr>
               <a:t>Gantt Charts</a:t>
             </a:r>
-            <a:endParaRPr lang="en-US" sz="1300" dirty="0"/>
+            <a:endParaRPr lang="en-US" sz="2000" dirty="0"/>
           </a:p>
         </p:txBody>
       </p:sp>
@@ -15210,7 +14982,7 @@
               <a:buNone/>
             </a:pPr>
             <a:r>
-              <a:rPr lang="en-US" sz="1300" b="1" dirty="0">
+              <a:rPr lang="en-US" sz="2000" b="1" dirty="0">
                 <a:solidFill>
                   <a:srgbClr val="1E2761"/>
                 </a:solidFill>
@@ -15220,7 +14992,7 @@
               </a:rPr>
               <a:t>Network Diagrams</a:t>
             </a:r>
-            <a:endParaRPr lang="en-US" sz="1300" dirty="0"/>
+            <a:endParaRPr lang="en-US" sz="2000" dirty="0"/>
           </a:p>
         </p:txBody>
       </p:sp>
@@ -15300,7 +15072,7 @@
               <a:buNone/>
             </a:pPr>
             <a:r>
-              <a:rPr lang="en-US" sz="1300" b="1" dirty="0">
+              <a:rPr lang="en-US" sz="2000" b="1" dirty="0">
                 <a:solidFill>
                   <a:srgbClr val="1E2761"/>
                 </a:solidFill>
@@ -15310,7 +15082,7 @@
               </a:rPr>
               <a:t>PERT Calculations</a:t>
             </a:r>
-            <a:endParaRPr lang="en-US" sz="1300" dirty="0"/>
+            <a:endParaRPr lang="en-US" sz="2000" dirty="0"/>
           </a:p>
         </p:txBody>
       </p:sp>
@@ -15390,7 +15162,7 @@
               <a:buNone/>
             </a:pPr>
             <a:r>
-              <a:rPr lang="en-US" sz="1300" b="1" dirty="0">
+              <a:rPr lang="en-US" sz="2000" b="1" dirty="0">
                 <a:solidFill>
                   <a:srgbClr val="1E2761"/>
                 </a:solidFill>
@@ -15400,7 +15172,7 @@
               </a:rPr>
               <a:t>Critical Path Scheduling</a:t>
             </a:r>
-            <a:endParaRPr lang="en-US" sz="1300" dirty="0"/>
+            <a:endParaRPr lang="en-US" sz="2000" dirty="0"/>
           </a:p>
         </p:txBody>
       </p:sp>
@@ -15480,7 +15252,7 @@
               <a:buNone/>
             </a:pPr>
             <a:r>
-              <a:rPr lang="en-US" sz="1300" b="1" dirty="0">
+              <a:rPr lang="en-US" sz="2000" b="1" dirty="0">
                 <a:solidFill>
                   <a:srgbClr val="1E2761"/>
                 </a:solidFill>
@@ -15490,7 +15262,7 @@
               </a:rPr>
               <a:t>Project Management Software</a:t>
             </a:r>
-            <a:endParaRPr lang="en-US" sz="1300" dirty="0"/>
+            <a:endParaRPr lang="en-US" sz="2000" dirty="0"/>
           </a:p>
         </p:txBody>
       </p:sp>
@@ -15530,45 +15302,6 @@
               <a:t>24</a:t>
             </a:r>
             <a:endParaRPr lang="en-US" sz="1000" dirty="0"/>
-          </a:p>
-        </p:txBody>
-      </p:sp>
-      <p:sp>
-        <p:nvSpPr>
-          <p:cNvPr id="20" name="Text 13"/>
-          <p:cNvSpPr/>
-          <p:nvPr/>
-        </p:nvSpPr>
-        <p:spPr>
-          <a:xfrm>
-            <a:off x="548640" y="6400800"/>
-            <a:ext cx="6400800" cy="274320"/>
-          </a:xfrm>
-          <a:prstGeom prst="rect">
-            <a:avLst/>
-          </a:prstGeom>
-          <a:noFill/>
-          <a:ln/>
-        </p:spPr>
-        <p:txBody>
-          <a:bodyPr wrap="square" rtlCol="0" anchor="ctr"/>
-          <a:lstStyle/>
-          <a:p>
-            <a:pPr marL="0" indent="0">
-              <a:buNone/>
-            </a:pPr>
-            <a:r>
-              <a:rPr lang="en-US" sz="900" dirty="0">
-                <a:solidFill>
-                  <a:srgbClr val="6B7A99"/>
-                </a:solidFill>
-                <a:latin typeface="Calibri" pitchFamily="34" charset="0"/>
-                <a:ea typeface="Calibri" pitchFamily="34" charset="-122"/>
-                <a:cs typeface="Calibri" pitchFamily="34" charset="-120"/>
-              </a:rPr>
-              <a:t>Ch. 3 — Managing the Information Systems Project</a:t>
-            </a:r>
-            <a:endParaRPr lang="en-US" sz="900" dirty="0"/>
           </a:p>
         </p:txBody>
       </p:sp>
@@ -15788,7 +15521,7 @@
               <a:buNone/>
             </a:pPr>
             <a:r>
-              <a:rPr lang="en-US" sz="1900" b="1" dirty="0">
+              <a:rPr lang="en-US" sz="2400" b="1" dirty="0">
                 <a:solidFill>
                   <a:srgbClr val="1E2761"/>
                 </a:solidFill>
@@ -15798,7 +15531,7 @@
               </a:rPr>
               <a:t>Gantt Charts</a:t>
             </a:r>
-            <a:endParaRPr lang="en-US" sz="1900" dirty="0"/>
+            <a:endParaRPr lang="en-US" sz="2400" dirty="0"/>
           </a:p>
         </p:txBody>
       </p:sp>
@@ -15854,7 +15587,7 @@
               <a:buNone/>
             </a:pPr>
             <a:r>
-              <a:rPr lang="en-US" sz="1350" dirty="0">
+              <a:rPr lang="en-US" dirty="0">
                 <a:solidFill>
                   <a:srgbClr val="33384A"/>
                 </a:solidFill>
@@ -15864,7 +15597,7 @@
               </a:rPr>
               <a:t>Show task durations</a:t>
             </a:r>
-            <a:endParaRPr lang="en-US" sz="1350" dirty="0"/>
+            <a:endParaRPr lang="en-US" dirty="0"/>
           </a:p>
         </p:txBody>
       </p:sp>
@@ -15920,7 +15653,7 @@
               <a:buNone/>
             </a:pPr>
             <a:r>
-              <a:rPr lang="en-US" sz="1350" dirty="0">
+              <a:rPr lang="en-US" dirty="0">
                 <a:solidFill>
                   <a:srgbClr val="33384A"/>
                 </a:solidFill>
@@ -15930,7 +15663,7 @@
               </a:rPr>
               <a:t>Show time overlap</a:t>
             </a:r>
-            <a:endParaRPr lang="en-US" sz="1350" dirty="0"/>
+            <a:endParaRPr lang="en-US" dirty="0"/>
           </a:p>
         </p:txBody>
       </p:sp>
@@ -15986,7 +15719,7 @@
               <a:buNone/>
             </a:pPr>
             <a:r>
-              <a:rPr lang="en-US" sz="1350" dirty="0">
+              <a:rPr lang="en-US" dirty="0">
                 <a:solidFill>
                   <a:srgbClr val="33384A"/>
                 </a:solidFill>
@@ -15996,7 +15729,7 @@
               </a:rPr>
               <a:t>Show slack time within a bar's duration</a:t>
             </a:r>
-            <a:endParaRPr lang="en-US" sz="1350" dirty="0"/>
+            <a:endParaRPr lang="en-US" dirty="0"/>
           </a:p>
         </p:txBody>
       </p:sp>
@@ -16105,7 +15838,7 @@
               <a:buNone/>
             </a:pPr>
             <a:r>
-              <a:rPr lang="en-US" sz="1900" b="1" dirty="0">
+              <a:rPr lang="en-US" sz="2400" b="1" dirty="0">
                 <a:solidFill>
                   <a:srgbClr val="1E2761"/>
                 </a:solidFill>
@@ -16115,7 +15848,7 @@
               </a:rPr>
               <a:t>Network Diagrams</a:t>
             </a:r>
-            <a:endParaRPr lang="en-US" sz="1900" dirty="0"/>
+            <a:endParaRPr lang="en-US" sz="2400" dirty="0"/>
           </a:p>
         </p:txBody>
       </p:sp>
@@ -16171,7 +15904,7 @@
               <a:buNone/>
             </a:pPr>
             <a:r>
-              <a:rPr lang="en-US" sz="1350" dirty="0">
+              <a:rPr lang="en-US" dirty="0">
                 <a:solidFill>
                   <a:srgbClr val="33384A"/>
                 </a:solidFill>
@@ -16181,7 +15914,7 @@
               </a:rPr>
               <a:t>Show task dependencies</a:t>
             </a:r>
-            <a:endParaRPr lang="en-US" sz="1350" dirty="0"/>
+            <a:endParaRPr lang="en-US" dirty="0"/>
           </a:p>
         </p:txBody>
       </p:sp>
@@ -16237,7 +15970,7 @@
               <a:buNone/>
             </a:pPr>
             <a:r>
-              <a:rPr lang="en-US" sz="1350" dirty="0">
+              <a:rPr lang="en-US" dirty="0">
                 <a:solidFill>
                   <a:srgbClr val="33384A"/>
                 </a:solidFill>
@@ -16247,7 +15980,7 @@
               </a:rPr>
               <a:t>Show parallelism, not time overlap</a:t>
             </a:r>
-            <a:endParaRPr lang="en-US" sz="1350" dirty="0"/>
+            <a:endParaRPr lang="en-US" dirty="0"/>
           </a:p>
         </p:txBody>
       </p:sp>
@@ -16303,7 +16036,7 @@
               <a:buNone/>
             </a:pPr>
             <a:r>
-              <a:rPr lang="en-US" sz="1350" dirty="0">
+              <a:rPr lang="en-US" dirty="0">
                 <a:solidFill>
                   <a:srgbClr val="33384A"/>
                 </a:solidFill>
@@ -16313,7 +16046,7 @@
               </a:rPr>
               <a:t>Show slack time inside the boxes</a:t>
             </a:r>
-            <a:endParaRPr lang="en-US" sz="1350" dirty="0"/>
+            <a:endParaRPr lang="en-US" dirty="0"/>
           </a:p>
         </p:txBody>
       </p:sp>
@@ -16353,45 +16086,6 @@
               <a:t>25</a:t>
             </a:r>
             <a:endParaRPr lang="en-US" sz="1000" dirty="0"/>
-          </a:p>
-        </p:txBody>
-      </p:sp>
-      <p:sp>
-        <p:nvSpPr>
-          <p:cNvPr id="25" name="Text 21"/>
-          <p:cNvSpPr/>
-          <p:nvPr/>
-        </p:nvSpPr>
-        <p:spPr>
-          <a:xfrm>
-            <a:off x="548640" y="6400800"/>
-            <a:ext cx="6400800" cy="274320"/>
-          </a:xfrm>
-          <a:prstGeom prst="rect">
-            <a:avLst/>
-          </a:prstGeom>
-          <a:noFill/>
-          <a:ln/>
-        </p:spPr>
-        <p:txBody>
-          <a:bodyPr wrap="square" rtlCol="0" anchor="ctr"/>
-          <a:lstStyle/>
-          <a:p>
-            <a:pPr marL="0" indent="0">
-              <a:buNone/>
-            </a:pPr>
-            <a:r>
-              <a:rPr lang="en-US" sz="900" dirty="0">
-                <a:solidFill>
-                  <a:srgbClr val="6B7A99"/>
-                </a:solidFill>
-                <a:latin typeface="Calibri" pitchFamily="34" charset="0"/>
-                <a:ea typeface="Calibri" pitchFamily="34" charset="-122"/>
-                <a:cs typeface="Calibri" pitchFamily="34" charset="-120"/>
-              </a:rPr>
-              <a:t>Ch. 3 — Managing the Information Systems Project</a:t>
-            </a:r>
-            <a:endParaRPr lang="en-US" sz="900" dirty="0"/>
           </a:p>
         </p:txBody>
       </p:sp>
@@ -16531,7 +16225,7 @@
               <a:buNone/>
             </a:pPr>
             <a:r>
-              <a:rPr lang="en-US" sz="1500" i="1" dirty="0">
+              <a:rPr lang="en-US" i="1" dirty="0">
                 <a:solidFill>
                   <a:srgbClr val="1E2761"/>
                 </a:solidFill>
@@ -16541,7 +16235,7 @@
               </a:rPr>
               <a:t>PERT — Program Evaluation Review Technique</a:t>
             </a:r>
-            <a:endParaRPr lang="en-US" sz="1500" dirty="0"/>
+            <a:endParaRPr lang="en-US" dirty="0"/>
           </a:p>
         </p:txBody>
       </p:sp>
@@ -16570,7 +16264,7 @@
               <a:buNone/>
             </a:pPr>
             <a:r>
-              <a:rPr lang="en-US" sz="1400" dirty="0">
+              <a:rPr lang="en-US" dirty="0">
                 <a:solidFill>
                   <a:srgbClr val="33384A"/>
                 </a:solidFill>
@@ -16580,7 +16274,7 @@
               </a:rPr>
               <a:t>Combines an optimistic (o), pessimistic (p), and realistic (r) time estimate to produce one expected task duration.</a:t>
             </a:r>
-            <a:endParaRPr lang="en-US" sz="1400" dirty="0"/>
+            <a:endParaRPr lang="en-US" dirty="0"/>
           </a:p>
         </p:txBody>
       </p:sp>
@@ -16716,7 +16410,7 @@
               <a:buNone/>
             </a:pPr>
             <a:r>
-              <a:rPr lang="en-US" sz="1200" dirty="0">
+              <a:rPr lang="en-US" sz="1600" dirty="0">
                 <a:solidFill>
                   <a:srgbClr val="33384A"/>
                 </a:solidFill>
@@ -16726,7 +16420,7 @@
               </a:rPr>
               <a:t>Optimistic time</a:t>
             </a:r>
-            <a:endParaRPr lang="en-US" sz="1200" dirty="0"/>
+            <a:endParaRPr lang="en-US" sz="1600" dirty="0"/>
           </a:p>
         </p:txBody>
       </p:sp>
@@ -16794,7 +16488,7 @@
               <a:buNone/>
             </a:pPr>
             <a:r>
-              <a:rPr lang="en-US" sz="1200" dirty="0">
+              <a:rPr lang="en-US" sz="1600" dirty="0">
                 <a:solidFill>
                   <a:srgbClr val="33384A"/>
                 </a:solidFill>
@@ -16804,7 +16498,7 @@
               </a:rPr>
               <a:t>Realistic (most likely) time</a:t>
             </a:r>
-            <a:endParaRPr lang="en-US" sz="1200" dirty="0"/>
+            <a:endParaRPr lang="en-US" sz="1600" dirty="0"/>
           </a:p>
         </p:txBody>
       </p:sp>
@@ -16872,7 +16566,7 @@
               <a:buNone/>
             </a:pPr>
             <a:r>
-              <a:rPr lang="en-US" sz="1200" dirty="0">
+              <a:rPr lang="en-US" sz="1600" dirty="0">
                 <a:solidFill>
                   <a:srgbClr val="33384A"/>
                 </a:solidFill>
@@ -16882,7 +16576,7 @@
               </a:rPr>
               <a:t>Pessimistic time</a:t>
             </a:r>
-            <a:endParaRPr lang="en-US" sz="1200" dirty="0"/>
+            <a:endParaRPr lang="en-US" sz="1600" dirty="0"/>
           </a:p>
         </p:txBody>
       </p:sp>
@@ -16950,7 +16644,7 @@
               <a:buNone/>
             </a:pPr>
             <a:r>
-              <a:rPr lang="en-US" sz="1200" dirty="0">
+              <a:rPr lang="en-US" sz="1600" dirty="0">
                 <a:solidFill>
                   <a:srgbClr val="33384A"/>
                 </a:solidFill>
@@ -16960,7 +16654,7 @@
               </a:rPr>
               <a:t>Expected task duration</a:t>
             </a:r>
-            <a:endParaRPr lang="en-US" sz="1200" dirty="0"/>
+            <a:endParaRPr lang="en-US" sz="1600" dirty="0"/>
           </a:p>
         </p:txBody>
       </p:sp>
@@ -17000,45 +16694,6 @@
               <a:t>26</a:t>
             </a:r>
             <a:endParaRPr lang="en-US" sz="1000" dirty="0"/>
-          </a:p>
-        </p:txBody>
-      </p:sp>
-      <p:sp>
-        <p:nvSpPr>
-          <p:cNvPr id="17" name="Text 15"/>
-          <p:cNvSpPr/>
-          <p:nvPr/>
-        </p:nvSpPr>
-        <p:spPr>
-          <a:xfrm>
-            <a:off x="548640" y="6400800"/>
-            <a:ext cx="6400800" cy="274320"/>
-          </a:xfrm>
-          <a:prstGeom prst="rect">
-            <a:avLst/>
-          </a:prstGeom>
-          <a:noFill/>
-          <a:ln/>
-        </p:spPr>
-        <p:txBody>
-          <a:bodyPr wrap="square" rtlCol="0" anchor="ctr"/>
-          <a:lstStyle/>
-          <a:p>
-            <a:pPr marL="0" indent="0">
-              <a:buNone/>
-            </a:pPr>
-            <a:r>
-              <a:rPr lang="en-US" sz="900" dirty="0">
-                <a:solidFill>
-                  <a:srgbClr val="6B7A99"/>
-                </a:solidFill>
-                <a:latin typeface="Calibri" pitchFamily="34" charset="0"/>
-                <a:ea typeface="Calibri" pitchFamily="34" charset="-122"/>
-                <a:cs typeface="Calibri" pitchFamily="34" charset="-120"/>
-              </a:rPr>
-              <a:t>Ch. 3 — Managing the Information Systems Project</a:t>
-            </a:r>
-            <a:endParaRPr lang="en-US" sz="900" dirty="0"/>
           </a:p>
         </p:txBody>
       </p:sp>
@@ -17123,7 +16778,7 @@
           <p:nvPr>
             <p:extLst>
               <p:ext uri="{D42A27DB-BD31-4B8C-83A1-F6EECF244321}">
-                <p14:modId xmlns:p14="http://schemas.microsoft.com/office/powerpoint/2010/main" val="4209389997"/>
+                <p14:modId xmlns:p14="http://schemas.microsoft.com/office/powerpoint/2010/main" val="2731860907"/>
               </p:ext>
             </p:extLst>
           </p:nvPr>
@@ -17495,14 +17150,14 @@
                         <a:buNone/>
                       </a:pPr>
                       <a:r>
-                        <a:rPr lang="en-US" sz="1250" dirty="0">
+                        <a:rPr lang="en-US" sz="1800" dirty="0">
                           <a:solidFill>
                             <a:srgbClr val="33384A"/>
                           </a:solidFill>
                         </a:rPr>
                         <a:t>1. Requirements Collection</a:t>
                       </a:r>
-                      <a:endParaRPr lang="en-US" sz="1250" dirty="0"/>
+                      <a:endParaRPr lang="en-US" sz="1800" dirty="0"/>
                     </a:p>
                   </a:txBody>
                   <a:tcPr>
@@ -17807,14 +17462,14 @@
                         <a:buNone/>
                       </a:pPr>
                       <a:r>
-                        <a:rPr lang="en-US" sz="1250" dirty="0">
+                        <a:rPr lang="en-US" sz="1800" dirty="0">
                           <a:solidFill>
                             <a:srgbClr val="33384A"/>
                           </a:solidFill>
                         </a:rPr>
                         <a:t>2. Screen Design</a:t>
                       </a:r>
-                      <a:endParaRPr lang="en-US" sz="1250" dirty="0"/>
+                      <a:endParaRPr lang="en-US" sz="1800" dirty="0"/>
                     </a:p>
                   </a:txBody>
                   <a:tcPr>
@@ -18119,14 +17774,14 @@
                         <a:buNone/>
                       </a:pPr>
                       <a:r>
-                        <a:rPr lang="en-US" sz="1250" dirty="0">
+                        <a:rPr lang="en-US" sz="1800" dirty="0">
                           <a:solidFill>
                             <a:srgbClr val="33384A"/>
                           </a:solidFill>
                         </a:rPr>
                         <a:t>3. Report Design</a:t>
                       </a:r>
-                      <a:endParaRPr lang="en-US" sz="1250" dirty="0"/>
+                      <a:endParaRPr lang="en-US" sz="1800" dirty="0"/>
                     </a:p>
                   </a:txBody>
                   <a:tcPr>
@@ -18431,14 +18086,14 @@
                         <a:buNone/>
                       </a:pPr>
                       <a:r>
-                        <a:rPr lang="en-US" sz="1250" dirty="0">
+                        <a:rPr lang="en-US" sz="1800" dirty="0">
                           <a:solidFill>
                             <a:srgbClr val="33384A"/>
                           </a:solidFill>
                         </a:rPr>
                         <a:t>4. Database Design</a:t>
                       </a:r>
-                      <a:endParaRPr lang="en-US" sz="1250" dirty="0"/>
+                      <a:endParaRPr lang="en-US" sz="1800" dirty="0"/>
                     </a:p>
                   </a:txBody>
                   <a:tcPr>
@@ -18743,14 +18398,14 @@
                         <a:buNone/>
                       </a:pPr>
                       <a:r>
-                        <a:rPr lang="en-US" sz="1250" dirty="0">
+                        <a:rPr lang="en-US" sz="1800" dirty="0">
                           <a:solidFill>
                             <a:srgbClr val="33384A"/>
                           </a:solidFill>
                         </a:rPr>
                         <a:t>5. User Documentation</a:t>
                       </a:r>
-                      <a:endParaRPr lang="en-US" sz="1250" dirty="0"/>
+                      <a:endParaRPr lang="en-US" sz="1800" dirty="0"/>
                     </a:p>
                   </a:txBody>
                   <a:tcPr>
@@ -19055,14 +18710,14 @@
                         <a:buNone/>
                       </a:pPr>
                       <a:r>
-                        <a:rPr lang="en-US" sz="1250" dirty="0">
+                        <a:rPr lang="en-US" sz="1800" dirty="0">
                           <a:solidFill>
                             <a:srgbClr val="33384A"/>
                           </a:solidFill>
                         </a:rPr>
                         <a:t>6. Programming</a:t>
                       </a:r>
-                      <a:endParaRPr lang="en-US" sz="1250" dirty="0"/>
+                      <a:endParaRPr lang="en-US" sz="1800" dirty="0"/>
                     </a:p>
                   </a:txBody>
                   <a:tcPr>
@@ -19367,14 +19022,14 @@
                         <a:buNone/>
                       </a:pPr>
                       <a:r>
-                        <a:rPr lang="en-US" sz="1250" dirty="0">
+                        <a:rPr lang="en-US" sz="1800" dirty="0">
                           <a:solidFill>
                             <a:srgbClr val="33384A"/>
                           </a:solidFill>
                         </a:rPr>
                         <a:t>7. Testing</a:t>
                       </a:r>
-                      <a:endParaRPr lang="en-US" sz="1250" dirty="0"/>
+                      <a:endParaRPr lang="en-US" sz="1800" dirty="0"/>
                     </a:p>
                   </a:txBody>
                   <a:tcPr>
@@ -19679,14 +19334,14 @@
                         <a:buNone/>
                       </a:pPr>
                       <a:r>
-                        <a:rPr lang="en-US" sz="1250" dirty="0">
+                        <a:rPr lang="en-US" sz="1800" dirty="0">
                           <a:solidFill>
                             <a:srgbClr val="33384A"/>
                           </a:solidFill>
                         </a:rPr>
                         <a:t>8. Installation</a:t>
                       </a:r>
-                      <a:endParaRPr lang="en-US" sz="1250" dirty="0"/>
+                      <a:endParaRPr lang="en-US" sz="1800" dirty="0"/>
                     </a:p>
                   </a:txBody>
                   <a:tcPr>
@@ -20010,14 +19665,14 @@
               <a:buNone/>
             </a:pPr>
             <a:r>
-              <a:rPr lang="en-US" sz="1250" b="1" i="1" dirty="0">
+              <a:rPr lang="en-US" sz="2000" b="1" i="1" dirty="0">
                 <a:latin typeface="Calibri" pitchFamily="34" charset="0"/>
                 <a:ea typeface="Calibri" pitchFamily="34" charset="-122"/>
                 <a:cs typeface="Calibri" pitchFamily="34" charset="-120"/>
               </a:rPr>
               <a:t>Estimated time calculations for the project, using ET = (o + 4r + p) / 6.</a:t>
             </a:r>
-            <a:endParaRPr lang="en-US" sz="1250" b="1" dirty="0"/>
+            <a:endParaRPr lang="en-US" sz="2000" b="1" dirty="0"/>
           </a:p>
         </p:txBody>
       </p:sp>
@@ -20057,45 +19712,6 @@
               <a:t>27</a:t>
             </a:r>
             <a:endParaRPr lang="en-US" sz="1000" dirty="0"/>
-          </a:p>
-        </p:txBody>
-      </p:sp>
-      <p:sp>
-        <p:nvSpPr>
-          <p:cNvPr id="7" name="Text 4"/>
-          <p:cNvSpPr/>
-          <p:nvPr/>
-        </p:nvSpPr>
-        <p:spPr>
-          <a:xfrm>
-            <a:off x="548640" y="6400800"/>
-            <a:ext cx="6400800" cy="274320"/>
-          </a:xfrm>
-          <a:prstGeom prst="rect">
-            <a:avLst/>
-          </a:prstGeom>
-          <a:noFill/>
-          <a:ln/>
-        </p:spPr>
-        <p:txBody>
-          <a:bodyPr wrap="square" rtlCol="0" anchor="ctr"/>
-          <a:lstStyle/>
-          <a:p>
-            <a:pPr marL="0" indent="0">
-              <a:buNone/>
-            </a:pPr>
-            <a:r>
-              <a:rPr lang="en-US" sz="900" dirty="0">
-                <a:solidFill>
-                  <a:srgbClr val="6B7A99"/>
-                </a:solidFill>
-                <a:latin typeface="Calibri" pitchFamily="34" charset="0"/>
-                <a:ea typeface="Calibri" pitchFamily="34" charset="-122"/>
-                <a:cs typeface="Calibri" pitchFamily="34" charset="-120"/>
-              </a:rPr>
-              <a:t>Ch. 3 — Managing the Information Systems Project</a:t>
-            </a:r>
-            <a:endParaRPr lang="en-US" sz="900" dirty="0"/>
           </a:p>
         </p:txBody>
       </p:sp>
@@ -20235,7 +19851,7 @@
               <a:buNone/>
             </a:pPr>
             <a:r>
-              <a:rPr lang="en-US" sz="1500" i="1" dirty="0">
+              <a:rPr lang="en-US" i="1" dirty="0">
                 <a:solidFill>
                   <a:srgbClr val="1E2761"/>
                 </a:solidFill>
@@ -20245,7 +19861,7 @@
               </a:rPr>
               <a:t>A scheduling technique in which the order and duration of a sequence of activities directly determines the project's completion date.</a:t>
             </a:r>
-            <a:endParaRPr lang="en-US" sz="1500" dirty="0"/>
+            <a:endParaRPr lang="en-US" dirty="0"/>
           </a:p>
         </p:txBody>
       </p:sp>
@@ -20354,7 +19970,7 @@
               <a:buNone/>
             </a:pPr>
             <a:r>
-              <a:rPr lang="en-US" sz="1700" b="1" dirty="0">
+              <a:rPr lang="en-US" sz="2000" b="1" dirty="0">
                 <a:solidFill>
                   <a:srgbClr val="1E2761"/>
                 </a:solidFill>
@@ -20364,7 +19980,7 @@
               </a:rPr>
               <a:t>Critical Path</a:t>
             </a:r>
-            <a:endParaRPr lang="en-US" sz="1700" dirty="0"/>
+            <a:endParaRPr lang="en-US" sz="2000" dirty="0"/>
           </a:p>
         </p:txBody>
       </p:sp>
@@ -20393,7 +20009,7 @@
               <a:buNone/>
             </a:pPr>
             <a:r>
-              <a:rPr lang="en-US" sz="1300" dirty="0">
+              <a:rPr lang="en-US" sz="1600" dirty="0">
                 <a:solidFill>
                   <a:srgbClr val="33384A"/>
                 </a:solidFill>
@@ -20403,7 +20019,7 @@
               </a:rPr>
               <a:t>The shortest time in which the entire project can be completed — its longest chain of dependent tasks.</a:t>
             </a:r>
-            <a:endParaRPr lang="en-US" sz="1300" dirty="0"/>
+            <a:endParaRPr lang="en-US" sz="1600" dirty="0"/>
           </a:p>
         </p:txBody>
       </p:sp>
@@ -20512,7 +20128,7 @@
               <a:buNone/>
             </a:pPr>
             <a:r>
-              <a:rPr lang="en-US" sz="1700" b="1" dirty="0">
+              <a:rPr lang="en-US" sz="2000" b="1" dirty="0">
                 <a:solidFill>
                   <a:srgbClr val="1E2761"/>
                 </a:solidFill>
@@ -20522,7 +20138,7 @@
               </a:rPr>
               <a:t>Slack Time</a:t>
             </a:r>
-            <a:endParaRPr lang="en-US" sz="1700" dirty="0"/>
+            <a:endParaRPr lang="en-US" sz="2000" dirty="0"/>
           </a:p>
         </p:txBody>
       </p:sp>
@@ -20551,7 +20167,7 @@
               <a:buNone/>
             </a:pPr>
             <a:r>
-              <a:rPr lang="en-US" sz="1300" dirty="0">
+              <a:rPr lang="en-US" sz="1600" dirty="0">
                 <a:solidFill>
                   <a:srgbClr val="33384A"/>
                 </a:solidFill>
@@ -20561,7 +20177,7 @@
               </a:rPr>
               <a:t>The amount an activity can be delayed without pushing back the overall project.</a:t>
             </a:r>
-            <a:endParaRPr lang="en-US" sz="1300" dirty="0"/>
+            <a:endParaRPr lang="en-US" sz="1600" dirty="0"/>
           </a:p>
         </p:txBody>
       </p:sp>
@@ -20601,45 +20217,6 @@
               <a:t>28</a:t>
             </a:r>
             <a:endParaRPr lang="en-US" sz="1000" dirty="0"/>
-          </a:p>
-        </p:txBody>
-      </p:sp>
-      <p:sp>
-        <p:nvSpPr>
-          <p:cNvPr id="16" name="Text 12"/>
-          <p:cNvSpPr/>
-          <p:nvPr/>
-        </p:nvSpPr>
-        <p:spPr>
-          <a:xfrm>
-            <a:off x="548640" y="6400800"/>
-            <a:ext cx="6400800" cy="274320"/>
-          </a:xfrm>
-          <a:prstGeom prst="rect">
-            <a:avLst/>
-          </a:prstGeom>
-          <a:noFill/>
-          <a:ln/>
-        </p:spPr>
-        <p:txBody>
-          <a:bodyPr wrap="square" rtlCol="0" anchor="ctr"/>
-          <a:lstStyle/>
-          <a:p>
-            <a:pPr marL="0" indent="0">
-              <a:buNone/>
-            </a:pPr>
-            <a:r>
-              <a:rPr lang="en-US" sz="900" dirty="0">
-                <a:solidFill>
-                  <a:srgbClr val="6B7A99"/>
-                </a:solidFill>
-                <a:latin typeface="Calibri" pitchFamily="34" charset="0"/>
-                <a:ea typeface="Calibri" pitchFamily="34" charset="-122"/>
-                <a:cs typeface="Calibri" pitchFamily="34" charset="-120"/>
-              </a:rPr>
-              <a:t>Ch. 3 — Managing the Information Systems Project</a:t>
-            </a:r>
-            <a:endParaRPr lang="en-US" sz="900" dirty="0"/>
           </a:p>
         </p:txBody>
       </p:sp>
@@ -20724,14 +20301,14 @@
           <p:nvPr>
             <p:extLst>
               <p:ext uri="{D42A27DB-BD31-4B8C-83A1-F6EECF244321}">
-                <p14:modId xmlns:p14="http://schemas.microsoft.com/office/powerpoint/2010/main" val="3768382062"/>
+                <p14:modId xmlns:p14="http://schemas.microsoft.com/office/powerpoint/2010/main" val="766266490"/>
               </p:ext>
             </p:extLst>
           </p:nvPr>
         </p:nvGraphicFramePr>
         <p:xfrm>
           <a:off x="1463040" y="1883664"/>
-          <a:ext cx="5943600" cy="3291840"/>
+          <a:ext cx="5943600" cy="3535680"/>
         </p:xfrm>
         <a:graphic>
           <a:graphicData uri="http://schemas.openxmlformats.org/drawingml/2006/table">
@@ -20892,14 +20469,14 @@
                         <a:buNone/>
                       </a:pPr>
                       <a:r>
-                        <a:rPr lang="en-US" sz="1400" dirty="0">
+                        <a:rPr lang="en-US" sz="2000" dirty="0">
                           <a:solidFill>
                             <a:srgbClr val="33384A"/>
                           </a:solidFill>
                         </a:rPr>
                         <a:t>1. Requirements Collection</a:t>
                       </a:r>
-                      <a:endParaRPr lang="en-US" sz="1400" dirty="0"/>
+                      <a:endParaRPr lang="en-US" sz="2000" dirty="0"/>
                     </a:p>
                   </a:txBody>
                   <a:tcPr>
@@ -20953,14 +20530,14 @@
                         <a:buNone/>
                       </a:pPr>
                       <a:r>
-                        <a:rPr lang="en-US" sz="1400" b="1" dirty="0">
+                        <a:rPr lang="en-US" sz="2000" b="1" dirty="0">
                           <a:solidFill>
                             <a:srgbClr val="33384A"/>
                           </a:solidFill>
                         </a:rPr>
                         <a:t>—</a:t>
                       </a:r>
-                      <a:endParaRPr lang="en-US" sz="1400" dirty="0"/>
+                      <a:endParaRPr lang="en-US" sz="2000" dirty="0"/>
                     </a:p>
                   </a:txBody>
                   <a:tcPr>
@@ -21021,14 +20598,14 @@
                         <a:buNone/>
                       </a:pPr>
                       <a:r>
-                        <a:rPr lang="en-US" sz="1400" dirty="0">
+                        <a:rPr lang="en-US" sz="2000" dirty="0">
                           <a:solidFill>
                             <a:srgbClr val="33384A"/>
                           </a:solidFill>
                         </a:rPr>
                         <a:t>2. Screen Design</a:t>
                       </a:r>
-                      <a:endParaRPr lang="en-US" sz="1400" dirty="0"/>
+                      <a:endParaRPr lang="en-US" sz="2000" dirty="0"/>
                     </a:p>
                   </a:txBody>
                   <a:tcPr>
@@ -21082,14 +20659,14 @@
                         <a:buNone/>
                       </a:pPr>
                       <a:r>
-                        <a:rPr lang="en-US" sz="1400" b="1" dirty="0">
+                        <a:rPr lang="en-US" sz="2000" b="1" dirty="0">
                           <a:solidFill>
                             <a:srgbClr val="33384A"/>
                           </a:solidFill>
                         </a:rPr>
                         <a:t>1</a:t>
                       </a:r>
-                      <a:endParaRPr lang="en-US" sz="1400" dirty="0"/>
+                      <a:endParaRPr lang="en-US" sz="2000" dirty="0"/>
                     </a:p>
                   </a:txBody>
                   <a:tcPr>
@@ -21150,14 +20727,14 @@
                         <a:buNone/>
                       </a:pPr>
                       <a:r>
-                        <a:rPr lang="en-US" sz="1400" dirty="0">
+                        <a:rPr lang="en-US" sz="2000" dirty="0">
                           <a:solidFill>
                             <a:srgbClr val="33384A"/>
                           </a:solidFill>
                         </a:rPr>
                         <a:t>3. Report Design</a:t>
                       </a:r>
-                      <a:endParaRPr lang="en-US" sz="1400" dirty="0"/>
+                      <a:endParaRPr lang="en-US" sz="2000" dirty="0"/>
                     </a:p>
                   </a:txBody>
                   <a:tcPr>
@@ -21211,14 +20788,14 @@
                         <a:buNone/>
                       </a:pPr>
                       <a:r>
-                        <a:rPr lang="en-US" sz="1400" b="1" dirty="0">
+                        <a:rPr lang="en-US" sz="2000" b="1" dirty="0">
                           <a:solidFill>
                             <a:srgbClr val="33384A"/>
                           </a:solidFill>
                         </a:rPr>
                         <a:t>1</a:t>
                       </a:r>
-                      <a:endParaRPr lang="en-US" sz="1400" dirty="0"/>
+                      <a:endParaRPr lang="en-US" sz="2000" dirty="0"/>
                     </a:p>
                   </a:txBody>
                   <a:tcPr>
@@ -21279,14 +20856,14 @@
                         <a:buNone/>
                       </a:pPr>
                       <a:r>
-                        <a:rPr lang="en-US" sz="1400" dirty="0">
+                        <a:rPr lang="en-US" sz="2000" dirty="0">
                           <a:solidFill>
                             <a:srgbClr val="33384A"/>
                           </a:solidFill>
                         </a:rPr>
                         <a:t>4. Database Design</a:t>
                       </a:r>
-                      <a:endParaRPr lang="en-US" sz="1400" dirty="0"/>
+                      <a:endParaRPr lang="en-US" sz="2000" dirty="0"/>
                     </a:p>
                   </a:txBody>
                   <a:tcPr>
@@ -21340,14 +20917,14 @@
                         <a:buNone/>
                       </a:pPr>
                       <a:r>
-                        <a:rPr lang="en-US" sz="1400" b="1" dirty="0">
+                        <a:rPr lang="en-US" sz="2000" b="1" dirty="0">
                           <a:solidFill>
                             <a:srgbClr val="33384A"/>
                           </a:solidFill>
                         </a:rPr>
                         <a:t>2, 3</a:t>
                       </a:r>
-                      <a:endParaRPr lang="en-US" sz="1400" dirty="0"/>
+                      <a:endParaRPr lang="en-US" sz="2000" dirty="0"/>
                     </a:p>
                   </a:txBody>
                   <a:tcPr>
@@ -21408,14 +20985,14 @@
                         <a:buNone/>
                       </a:pPr>
                       <a:r>
-                        <a:rPr lang="en-US" sz="1400" dirty="0">
+                        <a:rPr lang="en-US" sz="2000" dirty="0">
                           <a:solidFill>
                             <a:srgbClr val="33384A"/>
                           </a:solidFill>
                         </a:rPr>
                         <a:t>5. User Documentation</a:t>
                       </a:r>
-                      <a:endParaRPr lang="en-US" sz="1400" dirty="0"/>
+                      <a:endParaRPr lang="en-US" sz="2000" dirty="0"/>
                     </a:p>
                   </a:txBody>
                   <a:tcPr>
@@ -21469,14 +21046,14 @@
                         <a:buNone/>
                       </a:pPr>
                       <a:r>
-                        <a:rPr lang="en-US" sz="1400" b="1" dirty="0">
+                        <a:rPr lang="en-US" sz="2000" b="1" dirty="0">
                           <a:solidFill>
                             <a:srgbClr val="33384A"/>
                           </a:solidFill>
                         </a:rPr>
                         <a:t>4</a:t>
                       </a:r>
-                      <a:endParaRPr lang="en-US" sz="1400" dirty="0"/>
+                      <a:endParaRPr lang="en-US" sz="2000" dirty="0"/>
                     </a:p>
                   </a:txBody>
                   <a:tcPr>
@@ -21537,14 +21114,14 @@
                         <a:buNone/>
                       </a:pPr>
                       <a:r>
-                        <a:rPr lang="en-US" sz="1400" dirty="0">
+                        <a:rPr lang="en-US" sz="2000" dirty="0">
                           <a:solidFill>
                             <a:srgbClr val="33384A"/>
                           </a:solidFill>
                         </a:rPr>
                         <a:t>6. Programming</a:t>
                       </a:r>
-                      <a:endParaRPr lang="en-US" sz="1400" dirty="0"/>
+                      <a:endParaRPr lang="en-US" sz="2000" dirty="0"/>
                     </a:p>
                   </a:txBody>
                   <a:tcPr>
@@ -21598,14 +21175,14 @@
                         <a:buNone/>
                       </a:pPr>
                       <a:r>
-                        <a:rPr lang="en-US" sz="1400" b="1" dirty="0">
+                        <a:rPr lang="en-US" sz="2000" b="1" dirty="0">
                           <a:solidFill>
                             <a:srgbClr val="33384A"/>
                           </a:solidFill>
                         </a:rPr>
                         <a:t>4</a:t>
                       </a:r>
-                      <a:endParaRPr lang="en-US" sz="1400" dirty="0"/>
+                      <a:endParaRPr lang="en-US" sz="2000" dirty="0"/>
                     </a:p>
                   </a:txBody>
                   <a:tcPr>
@@ -21666,14 +21243,14 @@
                         <a:buNone/>
                       </a:pPr>
                       <a:r>
-                        <a:rPr lang="en-US" sz="1400" dirty="0">
+                        <a:rPr lang="en-US" sz="2000" dirty="0">
                           <a:solidFill>
                             <a:srgbClr val="33384A"/>
                           </a:solidFill>
                         </a:rPr>
                         <a:t>7. Testing</a:t>
                       </a:r>
-                      <a:endParaRPr lang="en-US" sz="1400" dirty="0"/>
+                      <a:endParaRPr lang="en-US" sz="2000" dirty="0"/>
                     </a:p>
                   </a:txBody>
                   <a:tcPr>
@@ -21727,14 +21304,14 @@
                         <a:buNone/>
                       </a:pPr>
                       <a:r>
-                        <a:rPr lang="en-US" sz="1400" b="1" dirty="0">
+                        <a:rPr lang="en-US" sz="2000" b="1" dirty="0">
                           <a:solidFill>
                             <a:srgbClr val="33384A"/>
                           </a:solidFill>
                         </a:rPr>
                         <a:t>6</a:t>
                       </a:r>
-                      <a:endParaRPr lang="en-US" sz="1400" dirty="0"/>
+                      <a:endParaRPr lang="en-US" sz="2000" dirty="0"/>
                     </a:p>
                   </a:txBody>
                   <a:tcPr>
@@ -21795,14 +21372,14 @@
                         <a:buNone/>
                       </a:pPr>
                       <a:r>
-                        <a:rPr lang="en-US" sz="1400" dirty="0">
+                        <a:rPr lang="en-US" sz="2000" dirty="0">
                           <a:solidFill>
                             <a:srgbClr val="33384A"/>
                           </a:solidFill>
                         </a:rPr>
                         <a:t>8. Installation</a:t>
                       </a:r>
-                      <a:endParaRPr lang="en-US" sz="1400" dirty="0"/>
+                      <a:endParaRPr lang="en-US" sz="2000" dirty="0"/>
                     </a:p>
                   </a:txBody>
                   <a:tcPr>
@@ -21856,14 +21433,14 @@
                         <a:buNone/>
                       </a:pPr>
                       <a:r>
-                        <a:rPr lang="en-US" sz="1400" b="1" dirty="0">
+                        <a:rPr lang="en-US" sz="2000" b="1" dirty="0">
                           <a:solidFill>
                             <a:srgbClr val="33384A"/>
                           </a:solidFill>
                         </a:rPr>
                         <a:t>5, 7</a:t>
                       </a:r>
-                      <a:endParaRPr lang="en-US" sz="1400" dirty="0"/>
+                      <a:endParaRPr lang="en-US" sz="2000" dirty="0"/>
                     </a:p>
                   </a:txBody>
                   <a:tcPr>
@@ -21943,7 +21520,7 @@
               <a:buNone/>
             </a:pPr>
             <a:r>
-              <a:rPr lang="en-US" sz="1400" i="1" dirty="0">
+              <a:rPr lang="en-US" i="1" dirty="0">
                 <a:solidFill>
                   <a:srgbClr val="1E2761"/>
                 </a:solidFill>
@@ -21953,7 +21530,7 @@
               </a:rPr>
               <a:t>A preceding activity must finish before the specified activity can begin.</a:t>
             </a:r>
-            <a:endParaRPr lang="en-US" sz="1400" dirty="0"/>
+            <a:endParaRPr lang="en-US" dirty="0"/>
           </a:p>
         </p:txBody>
       </p:sp>
@@ -21982,14 +21559,14 @@
               <a:buNone/>
             </a:pPr>
             <a:r>
-              <a:rPr lang="en-US" sz="1250" dirty="0">
+              <a:rPr lang="en-US" sz="1600" dirty="0">
                 <a:latin typeface="Calibri" pitchFamily="34" charset="0"/>
                 <a:ea typeface="Calibri" pitchFamily="34" charset="-122"/>
                 <a:cs typeface="Calibri" pitchFamily="34" charset="-120"/>
               </a:rPr>
               <a:t>This dependency table is the direct input to the network diagram on the next slide.</a:t>
             </a:r>
-            <a:endParaRPr lang="en-US" sz="1250" dirty="0"/>
+            <a:endParaRPr lang="en-US" sz="1600" dirty="0"/>
           </a:p>
         </p:txBody>
       </p:sp>
@@ -22029,45 +21606,6 @@
               <a:t>29</a:t>
             </a:r>
             <a:endParaRPr lang="en-US" sz="1000" dirty="0"/>
-          </a:p>
-        </p:txBody>
-      </p:sp>
-      <p:sp>
-        <p:nvSpPr>
-          <p:cNvPr id="8" name="Text 5"/>
-          <p:cNvSpPr/>
-          <p:nvPr/>
-        </p:nvSpPr>
-        <p:spPr>
-          <a:xfrm>
-            <a:off x="548640" y="6400800"/>
-            <a:ext cx="6400800" cy="274320"/>
-          </a:xfrm>
-          <a:prstGeom prst="rect">
-            <a:avLst/>
-          </a:prstGeom>
-          <a:noFill/>
-          <a:ln/>
-        </p:spPr>
-        <p:txBody>
-          <a:bodyPr wrap="square" rtlCol="0" anchor="ctr"/>
-          <a:lstStyle/>
-          <a:p>
-            <a:pPr marL="0" indent="0">
-              <a:buNone/>
-            </a:pPr>
-            <a:r>
-              <a:rPr lang="en-US" sz="900" dirty="0">
-                <a:solidFill>
-                  <a:srgbClr val="6B7A99"/>
-                </a:solidFill>
-                <a:latin typeface="Calibri" pitchFamily="34" charset="0"/>
-                <a:ea typeface="Calibri" pitchFamily="34" charset="-122"/>
-                <a:cs typeface="Calibri" pitchFamily="34" charset="-120"/>
-              </a:rPr>
-              <a:t>Ch. 3 — Managing the Information Systems Project</a:t>
-            </a:r>
-            <a:endParaRPr lang="en-US" sz="900" dirty="0"/>
           </a:p>
         </p:txBody>
       </p:sp>
@@ -22999,7 +22537,7 @@
               <a:buNone/>
             </a:pPr>
             <a:r>
-              <a:rPr lang="en-US" sz="1250" i="1" dirty="0">
+              <a:rPr lang="en-US" sz="2000" i="1" dirty="0">
                 <a:solidFill>
                   <a:srgbClr val="6B7A99"/>
                 </a:solidFill>
@@ -23009,7 +22547,7 @@
               </a:rPr>
               <a:t>Circles represent activities; arrows show the sequence between them.</a:t>
             </a:r>
-            <a:endParaRPr lang="en-US" sz="1250" dirty="0"/>
+            <a:endParaRPr lang="en-US" sz="2000" dirty="0"/>
           </a:p>
         </p:txBody>
       </p:sp>
@@ -23038,7 +22576,7 @@
               <a:buNone/>
             </a:pPr>
             <a:r>
-              <a:rPr lang="en-US" sz="1250" b="1" dirty="0">
+              <a:rPr lang="en-US" sz="2000" b="1" dirty="0">
                 <a:solidFill>
                   <a:srgbClr val="1E2761"/>
                 </a:solidFill>
@@ -23048,7 +22586,7 @@
               </a:rPr>
               <a:t>Network diagram showing dependencies for the same eight activities.</a:t>
             </a:r>
-            <a:endParaRPr lang="en-US" sz="1250" dirty="0"/>
+            <a:endParaRPr lang="en-US" sz="2000" dirty="0"/>
           </a:p>
         </p:txBody>
       </p:sp>
@@ -23088,45 +22626,6 @@
               <a:t>30</a:t>
             </a:r>
             <a:endParaRPr lang="en-US" sz="1000" dirty="0"/>
-          </a:p>
-        </p:txBody>
-      </p:sp>
-      <p:sp>
-        <p:nvSpPr>
-          <p:cNvPr id="32" name="Text 30"/>
-          <p:cNvSpPr/>
-          <p:nvPr/>
-        </p:nvSpPr>
-        <p:spPr>
-          <a:xfrm>
-            <a:off x="548640" y="6400800"/>
-            <a:ext cx="6400800" cy="274320"/>
-          </a:xfrm>
-          <a:prstGeom prst="rect">
-            <a:avLst/>
-          </a:prstGeom>
-          <a:noFill/>
-          <a:ln/>
-        </p:spPr>
-        <p:txBody>
-          <a:bodyPr wrap="square" rtlCol="0" anchor="ctr"/>
-          <a:lstStyle/>
-          <a:p>
-            <a:pPr marL="0" indent="0">
-              <a:buNone/>
-            </a:pPr>
-            <a:r>
-              <a:rPr lang="en-US" sz="900" dirty="0">
-                <a:solidFill>
-                  <a:srgbClr val="6B7A99"/>
-                </a:solidFill>
-                <a:latin typeface="Calibri" pitchFamily="34" charset="0"/>
-                <a:ea typeface="Calibri" pitchFamily="34" charset="-122"/>
-                <a:cs typeface="Calibri" pitchFamily="34" charset="-120"/>
-              </a:rPr>
-              <a:t>Ch. 3 — Managing the Information Systems Project</a:t>
-            </a:r>
-            <a:endParaRPr lang="en-US" sz="900" dirty="0"/>
           </a:p>
         </p:txBody>
       </p:sp>
@@ -23332,7 +22831,7 @@
               <a:buNone/>
             </a:pPr>
             <a:r>
-              <a:rPr lang="en-US" sz="1700" b="1" dirty="0">
+              <a:rPr lang="en-US" sz="2400" b="1" dirty="0">
                 <a:solidFill>
                   <a:srgbClr val="1E2761"/>
                 </a:solidFill>
@@ -23342,7 +22841,7 @@
               </a:rPr>
               <a:t>Forward Pass</a:t>
             </a:r>
-            <a:endParaRPr lang="en-US" sz="1700" dirty="0"/>
+            <a:endParaRPr lang="en-US" sz="2400" dirty="0"/>
           </a:p>
         </p:txBody>
       </p:sp>
@@ -23371,7 +22870,7 @@
               <a:buNone/>
             </a:pPr>
             <a:r>
-              <a:rPr lang="en-US" sz="1350" dirty="0">
+              <a:rPr lang="en-US" dirty="0">
                 <a:solidFill>
                   <a:srgbClr val="33384A"/>
                 </a:solidFill>
@@ -23381,7 +22880,7 @@
               </a:rPr>
               <a:t>Calculate each activity's earliest possible completion time by summing activity times along the longest path leading to it. This gives the total expected project time.</a:t>
             </a:r>
-            <a:endParaRPr lang="en-US" sz="1350" dirty="0"/>
+            <a:endParaRPr lang="en-US" dirty="0"/>
           </a:p>
         </p:txBody>
       </p:sp>
@@ -23476,7 +22975,7 @@
               <a:buNone/>
             </a:pPr>
             <a:r>
-              <a:rPr lang="en-US" sz="1700" b="1" dirty="0">
+              <a:rPr lang="en-US" sz="2400" b="1" dirty="0">
                 <a:solidFill>
                   <a:srgbClr val="1E2761"/>
                 </a:solidFill>
@@ -23486,7 +22985,7 @@
               </a:rPr>
               <a:t>Backward Pass</a:t>
             </a:r>
-            <a:endParaRPr lang="en-US" sz="1700" dirty="0"/>
+            <a:endParaRPr lang="en-US" sz="2400" dirty="0"/>
           </a:p>
         </p:txBody>
       </p:sp>
@@ -23515,7 +23014,7 @@
               <a:buNone/>
             </a:pPr>
             <a:r>
-              <a:rPr lang="en-US" sz="1350" dirty="0">
+              <a:rPr lang="en-US" dirty="0">
                 <a:solidFill>
                   <a:srgbClr val="33384A"/>
                 </a:solidFill>
@@ -23525,7 +23024,7 @@
               </a:rPr>
               <a:t>Calculate each activity's latest possible completion time by subtracting the activity times on the path that follows it from the total expected time. This gives each activity's slack.</a:t>
             </a:r>
-            <a:endParaRPr lang="en-US" sz="1350" dirty="0"/>
+            <a:endParaRPr lang="en-US" dirty="0"/>
           </a:p>
         </p:txBody>
       </p:sp>
@@ -23620,7 +23119,7 @@
               <a:buNone/>
             </a:pPr>
             <a:r>
-              <a:rPr lang="en-US" sz="1700" b="1" dirty="0">
+              <a:rPr lang="en-US" sz="2400" b="1" dirty="0">
                 <a:solidFill>
                   <a:srgbClr val="1E2761"/>
                 </a:solidFill>
@@ -23630,7 +23129,7 @@
               </a:rPr>
               <a:t>Identify the Path</a:t>
             </a:r>
-            <a:endParaRPr lang="en-US" sz="1700" dirty="0"/>
+            <a:endParaRPr lang="en-US" sz="2400" dirty="0"/>
           </a:p>
         </p:txBody>
       </p:sp>
@@ -23659,7 +23158,7 @@
               <a:buNone/>
             </a:pPr>
             <a:r>
-              <a:rPr lang="en-US" sz="1350" dirty="0">
+              <a:rPr lang="en-US" dirty="0">
                 <a:solidFill>
                   <a:srgbClr val="33384A"/>
                 </a:solidFill>
@@ -23669,7 +23168,7 @@
               </a:rPr>
               <a:t>The critical path is the chain of activities with zero slack — any delay there delays the whole project.</a:t>
             </a:r>
-            <a:endParaRPr lang="en-US" sz="1350" dirty="0"/>
+            <a:endParaRPr lang="en-US" dirty="0"/>
           </a:p>
         </p:txBody>
       </p:sp>
@@ -23709,45 +23208,6 @@
               <a:t>31</a:t>
             </a:r>
             <a:endParaRPr lang="en-US" sz="1000" dirty="0"/>
-          </a:p>
-        </p:txBody>
-      </p:sp>
-      <p:sp>
-        <p:nvSpPr>
-          <p:cNvPr id="17" name="Text 15"/>
-          <p:cNvSpPr/>
-          <p:nvPr/>
-        </p:nvSpPr>
-        <p:spPr>
-          <a:xfrm>
-            <a:off x="548640" y="6400800"/>
-            <a:ext cx="6400800" cy="274320"/>
-          </a:xfrm>
-          <a:prstGeom prst="rect">
-            <a:avLst/>
-          </a:prstGeom>
-          <a:noFill/>
-          <a:ln/>
-        </p:spPr>
-        <p:txBody>
-          <a:bodyPr wrap="square" rtlCol="0" anchor="ctr"/>
-          <a:lstStyle/>
-          <a:p>
-            <a:pPr marL="0" indent="0">
-              <a:buNone/>
-            </a:pPr>
-            <a:r>
-              <a:rPr lang="en-US" sz="900" dirty="0">
-                <a:solidFill>
-                  <a:srgbClr val="6B7A99"/>
-                </a:solidFill>
-                <a:latin typeface="Calibri" pitchFamily="34" charset="0"/>
-                <a:ea typeface="Calibri" pitchFamily="34" charset="-122"/>
-                <a:cs typeface="Calibri" pitchFamily="34" charset="-120"/>
-              </a:rPr>
-              <a:t>Ch. 3 — Managing the Information Systems Project</a:t>
-            </a:r>
-            <a:endParaRPr lang="en-US" sz="900" dirty="0"/>
           </a:p>
         </p:txBody>
       </p:sp>
@@ -24179,8 +23639,8 @@
         </p:nvSpPr>
         <p:spPr>
           <a:xfrm>
-            <a:off x="502920" y="4032504"/>
-            <a:ext cx="1371600" cy="320040"/>
+            <a:off x="502919" y="4032504"/>
+            <a:ext cx="1497531" cy="320040"/>
           </a:xfrm>
           <a:prstGeom prst="rect">
             <a:avLst/>
@@ -24196,7 +23656,7 @@
               <a:buNone/>
             </a:pPr>
             <a:r>
-              <a:rPr lang="en-US" sz="1050" b="1" dirty="0">
+              <a:rPr lang="en-US" sz="1600" b="1" dirty="0">
                 <a:solidFill>
                   <a:srgbClr val="C0392B"/>
                 </a:solidFill>
@@ -24206,7 +23666,7 @@
               </a:rPr>
               <a:t>ES 0  |  LS 0</a:t>
             </a:r>
-            <a:endParaRPr lang="en-US" sz="1050" dirty="0"/>
+            <a:endParaRPr lang="en-US" sz="1600" dirty="0"/>
           </a:p>
         </p:txBody>
       </p:sp>
@@ -24287,8 +23747,8 @@
         </p:nvSpPr>
         <p:spPr>
           <a:xfrm>
-            <a:off x="2606040" y="1929384"/>
-            <a:ext cx="1371600" cy="320040"/>
+            <a:off x="2606039" y="1929384"/>
+            <a:ext cx="1497531" cy="320040"/>
           </a:xfrm>
           <a:prstGeom prst="rect">
             <a:avLst/>
@@ -24304,7 +23764,7 @@
               <a:buNone/>
             </a:pPr>
             <a:r>
-              <a:rPr lang="en-US" sz="1050" b="1" dirty="0">
+              <a:rPr lang="en-US" sz="1600" b="1" dirty="0">
                 <a:solidFill>
                   <a:srgbClr val="C0392B"/>
                 </a:solidFill>
@@ -24314,7 +23774,7 @@
               </a:rPr>
               <a:t>ES 5  |  LS 5</a:t>
             </a:r>
-            <a:endParaRPr lang="en-US" sz="1050" dirty="0"/>
+            <a:endParaRPr lang="en-US" sz="1600" dirty="0"/>
           </a:p>
         </p:txBody>
       </p:sp>
@@ -24395,8 +23855,8 @@
         </p:nvSpPr>
         <p:spPr>
           <a:xfrm>
-            <a:off x="2606040" y="4901184"/>
-            <a:ext cx="1371600" cy="320040"/>
+            <a:off x="2606039" y="4901184"/>
+            <a:ext cx="1497531" cy="320040"/>
           </a:xfrm>
           <a:prstGeom prst="rect">
             <a:avLst/>
@@ -24412,7 +23872,7 @@
               <a:buNone/>
             </a:pPr>
             <a:r>
-              <a:rPr lang="en-US" sz="1050" b="1" dirty="0">
+              <a:rPr lang="en-US" sz="1600" b="1" dirty="0">
                 <a:solidFill>
                   <a:srgbClr val="C0392B"/>
                 </a:solidFill>
@@ -24422,7 +23882,7 @@
               </a:rPr>
               <a:t>ES 5  |  LS 5</a:t>
             </a:r>
-            <a:endParaRPr lang="en-US" sz="1050" dirty="0"/>
+            <a:endParaRPr lang="en-US" sz="1600" dirty="0"/>
           </a:p>
         </p:txBody>
       </p:sp>
@@ -24503,8 +23963,8 @@
         </p:nvSpPr>
         <p:spPr>
           <a:xfrm>
-            <a:off x="4709160" y="4032504"/>
-            <a:ext cx="1371600" cy="320040"/>
+            <a:off x="4709159" y="4032504"/>
+            <a:ext cx="1497531" cy="320040"/>
           </a:xfrm>
           <a:prstGeom prst="rect">
             <a:avLst/>
@@ -24520,7 +23980,7 @@
               <a:buNone/>
             </a:pPr>
             <a:r>
-              <a:rPr lang="en-US" sz="1050" b="1" dirty="0">
+              <a:rPr lang="en-US" sz="1600" b="1" dirty="0">
                 <a:solidFill>
                   <a:srgbClr val="C0392B"/>
                 </a:solidFill>
@@ -24530,7 +23990,7 @@
               </a:rPr>
               <a:t>ES 13  |  LS 13</a:t>
             </a:r>
-            <a:endParaRPr lang="en-US" sz="1050" dirty="0"/>
+            <a:endParaRPr lang="en-US" sz="1600" dirty="0"/>
           </a:p>
         </p:txBody>
       </p:sp>
@@ -24611,8 +24071,8 @@
         </p:nvSpPr>
         <p:spPr>
           <a:xfrm>
-            <a:off x="6812280" y="1929384"/>
-            <a:ext cx="1371600" cy="320040"/>
+            <a:off x="6812279" y="1929384"/>
+            <a:ext cx="1497531" cy="320040"/>
           </a:xfrm>
           <a:prstGeom prst="rect">
             <a:avLst/>
@@ -24628,7 +24088,7 @@
               <a:buNone/>
             </a:pPr>
             <a:r>
-              <a:rPr lang="en-US" sz="1050" dirty="0">
+              <a:rPr lang="en-US" sz="1600" dirty="0">
                 <a:solidFill>
                   <a:srgbClr val="6B7A99"/>
                 </a:solidFill>
@@ -24638,7 +24098,7 @@
               </a:rPr>
               <a:t>ES 18.5  |  LS 21</a:t>
             </a:r>
-            <a:endParaRPr lang="en-US" sz="1050" dirty="0"/>
+            <a:endParaRPr lang="en-US" sz="1600" dirty="0"/>
           </a:p>
         </p:txBody>
       </p:sp>
@@ -24719,8 +24179,8 @@
         </p:nvSpPr>
         <p:spPr>
           <a:xfrm>
-            <a:off x="6812280" y="4901184"/>
-            <a:ext cx="1371600" cy="320040"/>
+            <a:off x="6812279" y="4901184"/>
+            <a:ext cx="1497531" cy="320040"/>
           </a:xfrm>
           <a:prstGeom prst="rect">
             <a:avLst/>
@@ -24736,7 +24196,7 @@
               <a:buNone/>
             </a:pPr>
             <a:r>
-              <a:rPr lang="en-US" sz="1050" b="1" dirty="0">
+              <a:rPr lang="en-US" sz="1600" b="1" dirty="0">
                 <a:solidFill>
                   <a:srgbClr val="C0392B"/>
                 </a:solidFill>
@@ -24746,7 +24206,7 @@
               </a:rPr>
               <a:t>ES 18  |  LS 18</a:t>
             </a:r>
-            <a:endParaRPr lang="en-US" sz="1050" dirty="0"/>
+            <a:endParaRPr lang="en-US" sz="1600" dirty="0"/>
           </a:p>
         </p:txBody>
       </p:sp>
@@ -24827,8 +24287,8 @@
         </p:nvSpPr>
         <p:spPr>
           <a:xfrm>
-            <a:off x="8915400" y="4901184"/>
-            <a:ext cx="1371600" cy="320040"/>
+            <a:off x="8915399" y="4901184"/>
+            <a:ext cx="1497531" cy="320040"/>
           </a:xfrm>
           <a:prstGeom prst="rect">
             <a:avLst/>
@@ -24844,7 +24304,7 @@
               <a:buNone/>
             </a:pPr>
             <a:r>
-              <a:rPr lang="en-US" sz="1050" b="1" dirty="0">
+              <a:rPr lang="en-US" sz="1600" b="1" dirty="0">
                 <a:solidFill>
                   <a:srgbClr val="C0392B"/>
                 </a:solidFill>
@@ -24854,7 +24314,7 @@
               </a:rPr>
               <a:t>ES 21  |  LS 21</a:t>
             </a:r>
-            <a:endParaRPr lang="en-US" sz="1050" dirty="0"/>
+            <a:endParaRPr lang="en-US" sz="1600" dirty="0"/>
           </a:p>
         </p:txBody>
       </p:sp>
@@ -24935,8 +24395,8 @@
         </p:nvSpPr>
         <p:spPr>
           <a:xfrm>
-            <a:off x="10652760" y="4032504"/>
-            <a:ext cx="1371600" cy="320040"/>
+            <a:off x="10652759" y="4032504"/>
+            <a:ext cx="1497531" cy="320040"/>
           </a:xfrm>
           <a:prstGeom prst="rect">
             <a:avLst/>
@@ -24952,7 +24412,7 @@
               <a:buNone/>
             </a:pPr>
             <a:r>
-              <a:rPr lang="en-US" sz="1050" b="1" dirty="0">
+              <a:rPr lang="en-US" sz="1600" b="1" dirty="0">
                 <a:solidFill>
                   <a:srgbClr val="C0392B"/>
                 </a:solidFill>
@@ -24962,7 +24422,7 @@
               </a:rPr>
               <a:t>ES 22  |  LS 22</a:t>
             </a:r>
-            <a:endParaRPr lang="en-US" sz="1050" dirty="0"/>
+            <a:endParaRPr lang="en-US" sz="1600" dirty="0"/>
           </a:p>
         </p:txBody>
       </p:sp>
@@ -24974,7 +24434,7 @@
         </p:nvSpPr>
         <p:spPr>
           <a:xfrm>
-            <a:off x="548640" y="5175504"/>
+            <a:off x="548640" y="5520407"/>
             <a:ext cx="10881360" cy="457200"/>
           </a:xfrm>
           <a:prstGeom prst="rect">
@@ -24991,7 +24451,7 @@
               <a:buNone/>
             </a:pPr>
             <a:r>
-              <a:rPr lang="en-US" sz="1250" i="1" dirty="0">
+              <a:rPr lang="en-US" i="1" dirty="0">
                 <a:solidFill>
                   <a:srgbClr val="6B7A99"/>
                 </a:solidFill>
@@ -25001,7 +24461,7 @@
               </a:rPr>
               <a:t>Early and late times are calculated for each activity; Activity 5 can begin late without affecting the finish date.</a:t>
             </a:r>
-            <a:endParaRPr lang="en-US" sz="1250" dirty="0"/>
+            <a:endParaRPr lang="en-US" dirty="0"/>
           </a:p>
         </p:txBody>
       </p:sp>
@@ -25041,45 +24501,6 @@
               <a:t>32</a:t>
             </a:r>
             <a:endParaRPr lang="en-US" sz="1000" dirty="0"/>
-          </a:p>
-        </p:txBody>
-      </p:sp>
-      <p:sp>
-        <p:nvSpPr>
-          <p:cNvPr id="39" name="Text 37"/>
-          <p:cNvSpPr/>
-          <p:nvPr/>
-        </p:nvSpPr>
-        <p:spPr>
-          <a:xfrm>
-            <a:off x="548640" y="6400800"/>
-            <a:ext cx="6400800" cy="274320"/>
-          </a:xfrm>
-          <a:prstGeom prst="rect">
-            <a:avLst/>
-          </a:prstGeom>
-          <a:noFill/>
-          <a:ln/>
-        </p:spPr>
-        <p:txBody>
-          <a:bodyPr wrap="square" rtlCol="0" anchor="ctr"/>
-          <a:lstStyle/>
-          <a:p>
-            <a:pPr marL="0" indent="0">
-              <a:buNone/>
-            </a:pPr>
-            <a:r>
-              <a:rPr lang="en-US" sz="900" dirty="0">
-                <a:solidFill>
-                  <a:srgbClr val="6B7A99"/>
-                </a:solidFill>
-                <a:latin typeface="Calibri" pitchFamily="34" charset="0"/>
-                <a:ea typeface="Calibri" pitchFamily="34" charset="-122"/>
-                <a:cs typeface="Calibri" pitchFamily="34" charset="-120"/>
-              </a:rPr>
-              <a:t>Ch. 3 — Managing the Information Systems Project</a:t>
-            </a:r>
-            <a:endParaRPr lang="en-US" sz="900" dirty="0"/>
           </a:p>
         </p:txBody>
       </p:sp>
@@ -25744,7 +25165,7 @@
           <p:nvPr>
             <p:extLst>
               <p:ext uri="{D42A27DB-BD31-4B8C-83A1-F6EECF244321}">
-                <p14:modId xmlns:p14="http://schemas.microsoft.com/office/powerpoint/2010/main" val="1579011935"/>
+                <p14:modId xmlns:p14="http://schemas.microsoft.com/office/powerpoint/2010/main" val="178564081"/>
               </p:ext>
             </p:extLst>
           </p:nvPr>
@@ -25804,14 +25225,14 @@
                         <a:buNone/>
                       </a:pPr>
                       <a:r>
-                        <a:rPr lang="en-US" sz="1250" b="1" dirty="0">
+                        <a:rPr lang="en-US" sz="1600" b="1" dirty="0">
                           <a:solidFill>
                             <a:srgbClr val="FFFFFF"/>
                           </a:solidFill>
                         </a:rPr>
                         <a:t>Activity</a:t>
                       </a:r>
-                      <a:endParaRPr lang="en-US" sz="1250" dirty="0"/>
+                      <a:endParaRPr lang="en-US" sz="1600" dirty="0"/>
                     </a:p>
                   </a:txBody>
                   <a:tcPr>
@@ -25865,14 +25286,14 @@
                         <a:buNone/>
                       </a:pPr>
                       <a:r>
-                        <a:rPr lang="en-US" sz="1250" b="1" dirty="0">
+                        <a:rPr lang="en-US" sz="1600" b="1" dirty="0">
                           <a:solidFill>
                             <a:srgbClr val="FFFFFF"/>
                           </a:solidFill>
                         </a:rPr>
                         <a:t>TE</a:t>
                       </a:r>
-                      <a:endParaRPr lang="en-US" sz="1250" dirty="0"/>
+                      <a:endParaRPr lang="en-US" sz="1600" dirty="0"/>
                     </a:p>
                   </a:txBody>
                   <a:tcPr>
@@ -25926,14 +25347,14 @@
                         <a:buNone/>
                       </a:pPr>
                       <a:r>
-                        <a:rPr lang="en-US" sz="1250" b="1" dirty="0">
+                        <a:rPr lang="en-US" sz="1600" b="1" dirty="0">
                           <a:solidFill>
                             <a:srgbClr val="FFFFFF"/>
                           </a:solidFill>
                         </a:rPr>
                         <a:t>TL</a:t>
                       </a:r>
-                      <a:endParaRPr lang="en-US" sz="1250" dirty="0"/>
+                      <a:endParaRPr lang="en-US" sz="1600" dirty="0"/>
                     </a:p>
                   </a:txBody>
                   <a:tcPr>
@@ -25987,14 +25408,14 @@
                         <a:buNone/>
                       </a:pPr>
                       <a:r>
-                        <a:rPr lang="en-US" sz="1250" b="1" dirty="0">
+                        <a:rPr lang="en-US" sz="1600" b="1" dirty="0">
                           <a:solidFill>
                             <a:srgbClr val="FFFFFF"/>
                           </a:solidFill>
                         </a:rPr>
                         <a:t>Slack (TL − TE)</a:t>
                       </a:r>
-                      <a:endParaRPr lang="en-US" sz="1250" dirty="0"/>
+                      <a:endParaRPr lang="en-US" sz="1600" dirty="0"/>
                     </a:p>
                   </a:txBody>
                   <a:tcPr>
@@ -26048,14 +25469,14 @@
                         <a:buNone/>
                       </a:pPr>
                       <a:r>
-                        <a:rPr lang="en-US" sz="1250" b="1" dirty="0">
+                        <a:rPr lang="en-US" sz="1600" b="1" dirty="0">
                           <a:solidFill>
                             <a:srgbClr val="FFFFFF"/>
                           </a:solidFill>
                         </a:rPr>
                         <a:t>On Critical Path</a:t>
                       </a:r>
-                      <a:endParaRPr lang="en-US" sz="1250" dirty="0"/>
+                      <a:endParaRPr lang="en-US" sz="1600" dirty="0"/>
                     </a:p>
                   </a:txBody>
                   <a:tcPr>
@@ -26116,14 +25537,14 @@
                         <a:buNone/>
                       </a:pPr>
                       <a:r>
-                        <a:rPr lang="en-US" sz="1250" b="1" dirty="0">
+                        <a:rPr lang="en-US" sz="1600" b="1" dirty="0">
                           <a:solidFill>
                             <a:srgbClr val="33384A"/>
                           </a:solidFill>
                         </a:rPr>
                         <a:t>1</a:t>
                       </a:r>
-                      <a:endParaRPr lang="en-US" sz="1250" dirty="0"/>
+                      <a:endParaRPr lang="en-US" sz="1600" dirty="0"/>
                     </a:p>
                   </a:txBody>
                   <a:tcPr>
@@ -26177,14 +25598,14 @@
                         <a:buNone/>
                       </a:pPr>
                       <a:r>
-                        <a:rPr lang="en-US" sz="1250" dirty="0">
+                        <a:rPr lang="en-US" sz="1600" dirty="0">
                           <a:solidFill>
                             <a:srgbClr val="33384A"/>
                           </a:solidFill>
                         </a:rPr>
                         <a:t>5</a:t>
                       </a:r>
-                      <a:endParaRPr lang="en-US" sz="1250" dirty="0"/>
+                      <a:endParaRPr lang="en-US" sz="1600" dirty="0"/>
                     </a:p>
                   </a:txBody>
                   <a:tcPr>
@@ -26238,14 +25659,14 @@
                         <a:buNone/>
                       </a:pPr>
                       <a:r>
-                        <a:rPr lang="en-US" sz="1250" dirty="0">
+                        <a:rPr lang="en-US" sz="1600" dirty="0">
                           <a:solidFill>
                             <a:srgbClr val="33384A"/>
                           </a:solidFill>
                         </a:rPr>
                         <a:t>5</a:t>
                       </a:r>
-                      <a:endParaRPr lang="en-US" sz="1250" dirty="0"/>
+                      <a:endParaRPr lang="en-US" sz="1600" dirty="0"/>
                     </a:p>
                   </a:txBody>
                   <a:tcPr>
@@ -26299,14 +25720,14 @@
                         <a:buNone/>
                       </a:pPr>
                       <a:r>
-                        <a:rPr lang="en-US" sz="1250" dirty="0">
+                        <a:rPr lang="en-US" sz="1600" dirty="0">
                           <a:solidFill>
                             <a:srgbClr val="33384A"/>
                           </a:solidFill>
                         </a:rPr>
                         <a:t>0</a:t>
                       </a:r>
-                      <a:endParaRPr lang="en-US" sz="1250" dirty="0"/>
+                      <a:endParaRPr lang="en-US" sz="1600" dirty="0"/>
                     </a:p>
                   </a:txBody>
                   <a:tcPr>
@@ -26360,14 +25781,14 @@
                         <a:buNone/>
                       </a:pPr>
                       <a:r>
-                        <a:rPr lang="en-US" sz="1300" b="1" dirty="0">
+                        <a:rPr lang="en-US" sz="1600" b="1" dirty="0">
                           <a:solidFill>
                             <a:srgbClr val="2E9E5B"/>
                           </a:solidFill>
                         </a:rPr>
                         <a:t>✓</a:t>
                       </a:r>
-                      <a:endParaRPr lang="en-US" sz="1300" dirty="0"/>
+                      <a:endParaRPr lang="en-US" sz="1600" dirty="0"/>
                     </a:p>
                   </a:txBody>
                   <a:tcPr>
@@ -26428,14 +25849,14 @@
                         <a:buNone/>
                       </a:pPr>
                       <a:r>
-                        <a:rPr lang="en-US" sz="1250" b="1" dirty="0">
+                        <a:rPr lang="en-US" sz="1600" b="1" dirty="0">
                           <a:solidFill>
                             <a:srgbClr val="33384A"/>
                           </a:solidFill>
                         </a:rPr>
                         <a:t>2</a:t>
                       </a:r>
-                      <a:endParaRPr lang="en-US" sz="1250" dirty="0"/>
+                      <a:endParaRPr lang="en-US" sz="1600" dirty="0"/>
                     </a:p>
                   </a:txBody>
                   <a:tcPr>
@@ -26489,14 +25910,14 @@
                         <a:buNone/>
                       </a:pPr>
                       <a:r>
-                        <a:rPr lang="en-US" sz="1250" dirty="0">
+                        <a:rPr lang="en-US" sz="1600" dirty="0">
                           <a:solidFill>
                             <a:srgbClr val="33384A"/>
                           </a:solidFill>
                         </a:rPr>
                         <a:t>11</a:t>
                       </a:r>
-                      <a:endParaRPr lang="en-US" sz="1250" dirty="0"/>
+                      <a:endParaRPr lang="en-US" sz="1600" dirty="0"/>
                     </a:p>
                   </a:txBody>
                   <a:tcPr>
@@ -26550,14 +25971,14 @@
                         <a:buNone/>
                       </a:pPr>
                       <a:r>
-                        <a:rPr lang="en-US" sz="1250" dirty="0">
+                        <a:rPr lang="en-US" sz="1600" dirty="0">
                           <a:solidFill>
                             <a:srgbClr val="33384A"/>
                           </a:solidFill>
                         </a:rPr>
                         <a:t>11</a:t>
                       </a:r>
-                      <a:endParaRPr lang="en-US" sz="1250" dirty="0"/>
+                      <a:endParaRPr lang="en-US" sz="1600" dirty="0"/>
                     </a:p>
                   </a:txBody>
                   <a:tcPr>
@@ -26611,14 +26032,14 @@
                         <a:buNone/>
                       </a:pPr>
                       <a:r>
-                        <a:rPr lang="en-US" sz="1250" dirty="0">
+                        <a:rPr lang="en-US" sz="1600" dirty="0">
                           <a:solidFill>
                             <a:srgbClr val="33384A"/>
                           </a:solidFill>
                         </a:rPr>
                         <a:t>0</a:t>
                       </a:r>
-                      <a:endParaRPr lang="en-US" sz="1250" dirty="0"/>
+                      <a:endParaRPr lang="en-US" sz="1600" dirty="0"/>
                     </a:p>
                   </a:txBody>
                   <a:tcPr>
@@ -26672,14 +26093,14 @@
                         <a:buNone/>
                       </a:pPr>
                       <a:r>
-                        <a:rPr lang="en-US" sz="1300" b="1" dirty="0">
+                        <a:rPr lang="en-US" sz="1600" b="1" dirty="0">
                           <a:solidFill>
                             <a:srgbClr val="2E9E5B"/>
                           </a:solidFill>
                         </a:rPr>
                         <a:t>✓</a:t>
                       </a:r>
-                      <a:endParaRPr lang="en-US" sz="1300" dirty="0"/>
+                      <a:endParaRPr lang="en-US" sz="1600" dirty="0"/>
                     </a:p>
                   </a:txBody>
                   <a:tcPr>
@@ -26740,14 +26161,14 @@
                         <a:buNone/>
                       </a:pPr>
                       <a:r>
-                        <a:rPr lang="en-US" sz="1250" b="1" dirty="0">
+                        <a:rPr lang="en-US" sz="1600" b="1" dirty="0">
                           <a:solidFill>
                             <a:srgbClr val="33384A"/>
                           </a:solidFill>
                         </a:rPr>
                         <a:t>3</a:t>
                       </a:r>
-                      <a:endParaRPr lang="en-US" sz="1250" dirty="0"/>
+                      <a:endParaRPr lang="en-US" sz="1600" dirty="0"/>
                     </a:p>
                   </a:txBody>
                   <a:tcPr>
@@ -26801,14 +26222,14 @@
                         <a:buNone/>
                       </a:pPr>
                       <a:r>
-                        <a:rPr lang="en-US" sz="1250" dirty="0">
+                        <a:rPr lang="en-US" sz="1600" dirty="0">
                           <a:solidFill>
                             <a:srgbClr val="33384A"/>
                           </a:solidFill>
                         </a:rPr>
                         <a:t>11</a:t>
                       </a:r>
-                      <a:endParaRPr lang="en-US" sz="1250" dirty="0"/>
+                      <a:endParaRPr lang="en-US" sz="1600" dirty="0"/>
                     </a:p>
                   </a:txBody>
                   <a:tcPr>
@@ -26862,14 +26283,14 @@
                         <a:buNone/>
                       </a:pPr>
                       <a:r>
-                        <a:rPr lang="en-US" sz="1250" dirty="0">
+                        <a:rPr lang="en-US" sz="1600" dirty="0">
                           <a:solidFill>
                             <a:srgbClr val="33384A"/>
                           </a:solidFill>
                         </a:rPr>
                         <a:t>11</a:t>
                       </a:r>
-                      <a:endParaRPr lang="en-US" sz="1250" dirty="0"/>
+                      <a:endParaRPr lang="en-US" sz="1600" dirty="0"/>
                     </a:p>
                   </a:txBody>
                   <a:tcPr>
@@ -26923,14 +26344,14 @@
                         <a:buNone/>
                       </a:pPr>
                       <a:r>
-                        <a:rPr lang="en-US" sz="1250" dirty="0">
+                        <a:rPr lang="en-US" sz="1600" dirty="0">
                           <a:solidFill>
                             <a:srgbClr val="33384A"/>
                           </a:solidFill>
                         </a:rPr>
                         <a:t>0</a:t>
                       </a:r>
-                      <a:endParaRPr lang="en-US" sz="1250" dirty="0"/>
+                      <a:endParaRPr lang="en-US" sz="1600" dirty="0"/>
                     </a:p>
                   </a:txBody>
                   <a:tcPr>
@@ -26984,14 +26405,14 @@
                         <a:buNone/>
                       </a:pPr>
                       <a:r>
-                        <a:rPr lang="en-US" sz="1300" b="1" dirty="0">
+                        <a:rPr lang="en-US" sz="1600" b="1" dirty="0">
                           <a:solidFill>
                             <a:srgbClr val="2E9E5B"/>
                           </a:solidFill>
                         </a:rPr>
                         <a:t>✓</a:t>
                       </a:r>
-                      <a:endParaRPr lang="en-US" sz="1300" dirty="0"/>
+                      <a:endParaRPr lang="en-US" sz="1600" dirty="0"/>
                     </a:p>
                   </a:txBody>
                   <a:tcPr>
@@ -27052,14 +26473,14 @@
                         <a:buNone/>
                       </a:pPr>
                       <a:r>
-                        <a:rPr lang="en-US" sz="1250" b="1" dirty="0">
+                        <a:rPr lang="en-US" sz="1600" b="1" dirty="0">
                           <a:solidFill>
                             <a:srgbClr val="33384A"/>
                           </a:solidFill>
                         </a:rPr>
                         <a:t>4</a:t>
                       </a:r>
-                      <a:endParaRPr lang="en-US" sz="1250" dirty="0"/>
+                      <a:endParaRPr lang="en-US" sz="1600" dirty="0"/>
                     </a:p>
                   </a:txBody>
                   <a:tcPr>
@@ -27113,14 +26534,14 @@
                         <a:buNone/>
                       </a:pPr>
                       <a:r>
-                        <a:rPr lang="en-US" sz="1250" dirty="0">
+                        <a:rPr lang="en-US" sz="1600" dirty="0">
                           <a:solidFill>
                             <a:srgbClr val="33384A"/>
                           </a:solidFill>
                         </a:rPr>
                         <a:t>13</a:t>
                       </a:r>
-                      <a:endParaRPr lang="en-US" sz="1250" dirty="0"/>
+                      <a:endParaRPr lang="en-US" sz="1600" dirty="0"/>
                     </a:p>
                   </a:txBody>
                   <a:tcPr>
@@ -27174,14 +26595,14 @@
                         <a:buNone/>
                       </a:pPr>
                       <a:r>
-                        <a:rPr lang="en-US" sz="1250" dirty="0">
+                        <a:rPr lang="en-US" sz="1600" dirty="0">
                           <a:solidFill>
                             <a:srgbClr val="33384A"/>
                           </a:solidFill>
                         </a:rPr>
                         <a:t>13</a:t>
                       </a:r>
-                      <a:endParaRPr lang="en-US" sz="1250" dirty="0"/>
+                      <a:endParaRPr lang="en-US" sz="1600" dirty="0"/>
                     </a:p>
                   </a:txBody>
                   <a:tcPr>
@@ -27235,14 +26656,14 @@
                         <a:buNone/>
                       </a:pPr>
                       <a:r>
-                        <a:rPr lang="en-US" sz="1250" dirty="0">
+                        <a:rPr lang="en-US" sz="1600" dirty="0">
                           <a:solidFill>
                             <a:srgbClr val="33384A"/>
                           </a:solidFill>
                         </a:rPr>
                         <a:t>0</a:t>
                       </a:r>
-                      <a:endParaRPr lang="en-US" sz="1250" dirty="0"/>
+                      <a:endParaRPr lang="en-US" sz="1600" dirty="0"/>
                     </a:p>
                   </a:txBody>
                   <a:tcPr>
@@ -27296,14 +26717,14 @@
                         <a:buNone/>
                       </a:pPr>
                       <a:r>
-                        <a:rPr lang="en-US" sz="1300" b="1" dirty="0">
+                        <a:rPr lang="en-US" sz="1600" b="1" dirty="0">
                           <a:solidFill>
                             <a:srgbClr val="2E9E5B"/>
                           </a:solidFill>
                         </a:rPr>
                         <a:t>✓</a:t>
                       </a:r>
-                      <a:endParaRPr lang="en-US" sz="1300" dirty="0"/>
+                      <a:endParaRPr lang="en-US" sz="1600" dirty="0"/>
                     </a:p>
                   </a:txBody>
                   <a:tcPr>
@@ -27364,14 +26785,14 @@
                         <a:buNone/>
                       </a:pPr>
                       <a:r>
-                        <a:rPr lang="en-US" sz="1250" b="1" dirty="0">
+                        <a:rPr lang="en-US" sz="1600" b="1" dirty="0">
                           <a:solidFill>
                             <a:srgbClr val="33384A"/>
                           </a:solidFill>
                         </a:rPr>
                         <a:t>5</a:t>
                       </a:r>
-                      <a:endParaRPr lang="en-US" sz="1250" dirty="0"/>
+                      <a:endParaRPr lang="en-US" sz="1600" dirty="0"/>
                     </a:p>
                   </a:txBody>
                   <a:tcPr>
@@ -27425,14 +26846,14 @@
                         <a:buNone/>
                       </a:pPr>
                       <a:r>
-                        <a:rPr lang="en-US" sz="1250" dirty="0">
+                        <a:rPr lang="en-US" sz="1600" dirty="0">
                           <a:solidFill>
                             <a:srgbClr val="33384A"/>
                           </a:solidFill>
                         </a:rPr>
                         <a:t>18.5</a:t>
                       </a:r>
-                      <a:endParaRPr lang="en-US" sz="1250" dirty="0"/>
+                      <a:endParaRPr lang="en-US" sz="1600" dirty="0"/>
                     </a:p>
                   </a:txBody>
                   <a:tcPr>
@@ -27486,14 +26907,14 @@
                         <a:buNone/>
                       </a:pPr>
                       <a:r>
-                        <a:rPr lang="en-US" sz="1250" dirty="0">
+                        <a:rPr lang="en-US" sz="1600" dirty="0">
                           <a:solidFill>
                             <a:srgbClr val="33384A"/>
                           </a:solidFill>
                         </a:rPr>
                         <a:t>21</a:t>
                       </a:r>
-                      <a:endParaRPr lang="en-US" sz="1250" dirty="0"/>
+                      <a:endParaRPr lang="en-US" sz="1600" dirty="0"/>
                     </a:p>
                   </a:txBody>
                   <a:tcPr>
@@ -27547,14 +26968,14 @@
                         <a:buNone/>
                       </a:pPr>
                       <a:r>
-                        <a:rPr lang="en-US" sz="1250" b="1" dirty="0">
+                        <a:rPr lang="en-US" sz="1600" b="1" dirty="0">
                           <a:solidFill>
                             <a:srgbClr val="C0392B"/>
                           </a:solidFill>
                         </a:rPr>
                         <a:t>2.5</a:t>
                       </a:r>
-                      <a:endParaRPr lang="en-US" sz="1250" dirty="0"/>
+                      <a:endParaRPr lang="en-US" sz="1600" dirty="0"/>
                     </a:p>
                   </a:txBody>
                   <a:tcPr>
@@ -27608,14 +27029,14 @@
                         <a:buNone/>
                       </a:pPr>
                       <a:r>
-                        <a:rPr lang="en-US" sz="1300" b="1" dirty="0">
+                        <a:rPr lang="en-US" sz="1600" b="1" dirty="0">
                           <a:solidFill>
                             <a:srgbClr val="6B7A99"/>
                           </a:solidFill>
                         </a:rPr>
                         <a:t>—</a:t>
                       </a:r>
-                      <a:endParaRPr lang="en-US" sz="1300" dirty="0"/>
+                      <a:endParaRPr lang="en-US" sz="1600" dirty="0"/>
                     </a:p>
                   </a:txBody>
                   <a:tcPr>
@@ -27676,14 +27097,14 @@
                         <a:buNone/>
                       </a:pPr>
                       <a:r>
-                        <a:rPr lang="en-US" sz="1250" b="1" dirty="0">
+                        <a:rPr lang="en-US" sz="1600" b="1" dirty="0">
                           <a:solidFill>
                             <a:srgbClr val="33384A"/>
                           </a:solidFill>
                         </a:rPr>
                         <a:t>6</a:t>
                       </a:r>
-                      <a:endParaRPr lang="en-US" sz="1250" dirty="0"/>
+                      <a:endParaRPr lang="en-US" sz="1600" dirty="0"/>
                     </a:p>
                   </a:txBody>
                   <a:tcPr>
@@ -27737,14 +27158,14 @@
                         <a:buNone/>
                       </a:pPr>
                       <a:r>
-                        <a:rPr lang="en-US" sz="1250" dirty="0">
+                        <a:rPr lang="en-US" sz="1600" dirty="0">
                           <a:solidFill>
                             <a:srgbClr val="33384A"/>
                           </a:solidFill>
                         </a:rPr>
                         <a:t>18</a:t>
                       </a:r>
-                      <a:endParaRPr lang="en-US" sz="1250" dirty="0"/>
+                      <a:endParaRPr lang="en-US" sz="1600" dirty="0"/>
                     </a:p>
                   </a:txBody>
                   <a:tcPr>
@@ -27798,14 +27219,14 @@
                         <a:buNone/>
                       </a:pPr>
                       <a:r>
-                        <a:rPr lang="en-US" sz="1250" dirty="0">
+                        <a:rPr lang="en-US" sz="1600" dirty="0">
                           <a:solidFill>
                             <a:srgbClr val="33384A"/>
                           </a:solidFill>
                         </a:rPr>
                         <a:t>18</a:t>
                       </a:r>
-                      <a:endParaRPr lang="en-US" sz="1250" dirty="0"/>
+                      <a:endParaRPr lang="en-US" sz="1600" dirty="0"/>
                     </a:p>
                   </a:txBody>
                   <a:tcPr>
@@ -27859,14 +27280,14 @@
                         <a:buNone/>
                       </a:pPr>
                       <a:r>
-                        <a:rPr lang="en-US" sz="1250" dirty="0">
+                        <a:rPr lang="en-US" sz="1600" dirty="0">
                           <a:solidFill>
                             <a:srgbClr val="33384A"/>
                           </a:solidFill>
                         </a:rPr>
                         <a:t>0</a:t>
                       </a:r>
-                      <a:endParaRPr lang="en-US" sz="1250" dirty="0"/>
+                      <a:endParaRPr lang="en-US" sz="1600" dirty="0"/>
                     </a:p>
                   </a:txBody>
                   <a:tcPr>
@@ -27920,14 +27341,14 @@
                         <a:buNone/>
                       </a:pPr>
                       <a:r>
-                        <a:rPr lang="en-US" sz="1300" b="1" dirty="0">
+                        <a:rPr lang="en-US" sz="1600" b="1" dirty="0">
                           <a:solidFill>
                             <a:srgbClr val="2E9E5B"/>
                           </a:solidFill>
                         </a:rPr>
                         <a:t>✓</a:t>
                       </a:r>
-                      <a:endParaRPr lang="en-US" sz="1300" dirty="0"/>
+                      <a:endParaRPr lang="en-US" sz="1600" dirty="0"/>
                     </a:p>
                   </a:txBody>
                   <a:tcPr>
@@ -27988,14 +27409,14 @@
                         <a:buNone/>
                       </a:pPr>
                       <a:r>
-                        <a:rPr lang="en-US" sz="1250" b="1" dirty="0">
+                        <a:rPr lang="en-US" sz="1600" b="1" dirty="0">
                           <a:solidFill>
                             <a:srgbClr val="33384A"/>
                           </a:solidFill>
                         </a:rPr>
                         <a:t>7</a:t>
                       </a:r>
-                      <a:endParaRPr lang="en-US" sz="1250" dirty="0"/>
+                      <a:endParaRPr lang="en-US" sz="1600" dirty="0"/>
                     </a:p>
                   </a:txBody>
                   <a:tcPr>
@@ -28049,14 +27470,14 @@
                         <a:buNone/>
                       </a:pPr>
                       <a:r>
-                        <a:rPr lang="en-US" sz="1250" dirty="0">
+                        <a:rPr lang="en-US" sz="1600" dirty="0">
                           <a:solidFill>
                             <a:srgbClr val="33384A"/>
                           </a:solidFill>
                         </a:rPr>
                         <a:t>21</a:t>
                       </a:r>
-                      <a:endParaRPr lang="en-US" sz="1250" dirty="0"/>
+                      <a:endParaRPr lang="en-US" sz="1600" dirty="0"/>
                     </a:p>
                   </a:txBody>
                   <a:tcPr>
@@ -28110,14 +27531,14 @@
                         <a:buNone/>
                       </a:pPr>
                       <a:r>
-                        <a:rPr lang="en-US" sz="1250" dirty="0">
+                        <a:rPr lang="en-US" sz="1600" dirty="0">
                           <a:solidFill>
                             <a:srgbClr val="33384A"/>
                           </a:solidFill>
                         </a:rPr>
                         <a:t>21</a:t>
                       </a:r>
-                      <a:endParaRPr lang="en-US" sz="1250" dirty="0"/>
+                      <a:endParaRPr lang="en-US" sz="1600" dirty="0"/>
                     </a:p>
                   </a:txBody>
                   <a:tcPr>
@@ -28171,14 +27592,14 @@
                         <a:buNone/>
                       </a:pPr>
                       <a:r>
-                        <a:rPr lang="en-US" sz="1250" dirty="0">
+                        <a:rPr lang="en-US" sz="1600" dirty="0">
                           <a:solidFill>
                             <a:srgbClr val="33384A"/>
                           </a:solidFill>
                         </a:rPr>
                         <a:t>0</a:t>
                       </a:r>
-                      <a:endParaRPr lang="en-US" sz="1250" dirty="0"/>
+                      <a:endParaRPr lang="en-US" sz="1600" dirty="0"/>
                     </a:p>
                   </a:txBody>
                   <a:tcPr>
@@ -28232,14 +27653,14 @@
                         <a:buNone/>
                       </a:pPr>
                       <a:r>
-                        <a:rPr lang="en-US" sz="1300" b="1" dirty="0">
+                        <a:rPr lang="en-US" sz="1600" b="1" dirty="0">
                           <a:solidFill>
                             <a:srgbClr val="2E9E5B"/>
                           </a:solidFill>
                         </a:rPr>
                         <a:t>✓</a:t>
                       </a:r>
-                      <a:endParaRPr lang="en-US" sz="1300" dirty="0"/>
+                      <a:endParaRPr lang="en-US" sz="1600" dirty="0"/>
                     </a:p>
                   </a:txBody>
                   <a:tcPr>
@@ -28300,14 +27721,14 @@
                         <a:buNone/>
                       </a:pPr>
                       <a:r>
-                        <a:rPr lang="en-US" sz="1250" b="1" dirty="0">
+                        <a:rPr lang="en-US" sz="1600" b="1" dirty="0">
                           <a:solidFill>
                             <a:srgbClr val="33384A"/>
                           </a:solidFill>
                         </a:rPr>
                         <a:t>8</a:t>
                       </a:r>
-                      <a:endParaRPr lang="en-US" sz="1250" dirty="0"/>
+                      <a:endParaRPr lang="en-US" sz="1600" dirty="0"/>
                     </a:p>
                   </a:txBody>
                   <a:tcPr>
@@ -28361,14 +27782,14 @@
                         <a:buNone/>
                       </a:pPr>
                       <a:r>
-                        <a:rPr lang="en-US" sz="1250" dirty="0">
+                        <a:rPr lang="en-US" sz="1600" dirty="0">
                           <a:solidFill>
                             <a:srgbClr val="33384A"/>
                           </a:solidFill>
                         </a:rPr>
                         <a:t>22</a:t>
                       </a:r>
-                      <a:endParaRPr lang="en-US" sz="1250" dirty="0"/>
+                      <a:endParaRPr lang="en-US" sz="1600" dirty="0"/>
                     </a:p>
                   </a:txBody>
                   <a:tcPr>
@@ -28422,14 +27843,14 @@
                         <a:buNone/>
                       </a:pPr>
                       <a:r>
-                        <a:rPr lang="en-US" sz="1250" dirty="0">
+                        <a:rPr lang="en-US" sz="1600" dirty="0">
                           <a:solidFill>
                             <a:srgbClr val="33384A"/>
                           </a:solidFill>
                         </a:rPr>
                         <a:t>22</a:t>
                       </a:r>
-                      <a:endParaRPr lang="en-US" sz="1250" dirty="0"/>
+                      <a:endParaRPr lang="en-US" sz="1600" dirty="0"/>
                     </a:p>
                   </a:txBody>
                   <a:tcPr>
@@ -28483,14 +27904,14 @@
                         <a:buNone/>
                       </a:pPr>
                       <a:r>
-                        <a:rPr lang="en-US" sz="1250" dirty="0">
+                        <a:rPr lang="en-US" sz="1600" dirty="0">
                           <a:solidFill>
                             <a:srgbClr val="33384A"/>
                           </a:solidFill>
                         </a:rPr>
                         <a:t>0</a:t>
                       </a:r>
-                      <a:endParaRPr lang="en-US" sz="1250" dirty="0"/>
+                      <a:endParaRPr lang="en-US" sz="1600" dirty="0"/>
                     </a:p>
                   </a:txBody>
                   <a:tcPr>
@@ -28544,14 +27965,14 @@
                         <a:buNone/>
                       </a:pPr>
                       <a:r>
-                        <a:rPr lang="en-US" sz="1300" b="1" dirty="0">
+                        <a:rPr lang="en-US" sz="1600" b="1" dirty="0">
                           <a:solidFill>
                             <a:srgbClr val="2E9E5B"/>
                           </a:solidFill>
                         </a:rPr>
                         <a:t>✓</a:t>
                       </a:r>
-                      <a:endParaRPr lang="en-US" sz="1300" dirty="0"/>
+                      <a:endParaRPr lang="en-US" sz="1600" dirty="0"/>
                     </a:p>
                   </a:txBody>
                   <a:tcPr>
@@ -28631,7 +28052,7 @@
               <a:buNone/>
             </a:pPr>
             <a:r>
-              <a:rPr lang="en-US" sz="1250" i="1" dirty="0">
+              <a:rPr lang="en-US" sz="2000" i="1" dirty="0">
                 <a:solidFill>
                   <a:srgbClr val="6B7A99"/>
                 </a:solidFill>
@@ -28641,7 +28062,7 @@
               </a:rPr>
               <a:t>Every activity except Activity 5 sits on the critical path — note its 2.5-day slack.</a:t>
             </a:r>
-            <a:endParaRPr lang="en-US" sz="1250" dirty="0"/>
+            <a:endParaRPr lang="en-US" sz="2000" dirty="0"/>
           </a:p>
         </p:txBody>
       </p:sp>
@@ -28681,45 +28102,6 @@
               <a:t>33</a:t>
             </a:r>
             <a:endParaRPr lang="en-US" sz="1000" dirty="0"/>
-          </a:p>
-        </p:txBody>
-      </p:sp>
-      <p:sp>
-        <p:nvSpPr>
-          <p:cNvPr id="7" name="Text 4"/>
-          <p:cNvSpPr/>
-          <p:nvPr/>
-        </p:nvSpPr>
-        <p:spPr>
-          <a:xfrm>
-            <a:off x="548640" y="6400800"/>
-            <a:ext cx="6400800" cy="274320"/>
-          </a:xfrm>
-          <a:prstGeom prst="rect">
-            <a:avLst/>
-          </a:prstGeom>
-          <a:noFill/>
-          <a:ln/>
-        </p:spPr>
-        <p:txBody>
-          <a:bodyPr wrap="square" rtlCol="0" anchor="ctr"/>
-          <a:lstStyle/>
-          <a:p>
-            <a:pPr marL="0" indent="0">
-              <a:buNone/>
-            </a:pPr>
-            <a:r>
-              <a:rPr lang="en-US" sz="900" dirty="0">
-                <a:solidFill>
-                  <a:srgbClr val="6B7A99"/>
-                </a:solidFill>
-                <a:latin typeface="Calibri" pitchFamily="34" charset="0"/>
-                <a:ea typeface="Calibri" pitchFamily="34" charset="-122"/>
-                <a:cs typeface="Calibri" pitchFamily="34" charset="-120"/>
-              </a:rPr>
-              <a:t>Ch. 3 — Managing the Information Systems Project</a:t>
-            </a:r>
-            <a:endParaRPr lang="en-US" sz="900" dirty="0"/>
           </a:p>
         </p:txBody>
       </p:sp>
@@ -28859,7 +28241,7 @@
               <a:buNone/>
             </a:pPr>
             <a:r>
-              <a:rPr lang="en-US" sz="1500" i="1" dirty="0">
+              <a:rPr lang="en-US" i="1" dirty="0">
                 <a:solidFill>
                   <a:srgbClr val="1E2761"/>
                 </a:solidFill>
@@ -28869,7 +28251,7 @@
               </a:rPr>
               <a:t>Many powerful software tools exist to assist with project management — Microsoft Project is a common example.</a:t>
             </a:r>
-            <a:endParaRPr lang="en-US" sz="1500" dirty="0"/>
+            <a:endParaRPr lang="en-US" dirty="0"/>
           </a:p>
         </p:txBody>
       </p:sp>
@@ -28949,7 +28331,7 @@
               <a:buNone/>
             </a:pPr>
             <a:r>
-              <a:rPr lang="en-US" sz="1450" b="1" dirty="0">
+              <a:rPr lang="en-US" b="1" dirty="0">
                 <a:solidFill>
                   <a:srgbClr val="1E2761"/>
                 </a:solidFill>
@@ -28959,7 +28341,7 @@
               </a:rPr>
               <a:t>Enter the project start date</a:t>
             </a:r>
-            <a:endParaRPr lang="en-US" sz="1450" dirty="0"/>
+            <a:endParaRPr lang="en-US" dirty="0"/>
           </a:p>
         </p:txBody>
       </p:sp>
@@ -29039,7 +28421,7 @@
               <a:buNone/>
             </a:pPr>
             <a:r>
-              <a:rPr lang="en-US" sz="1450" b="1" dirty="0">
+              <a:rPr lang="en-US" b="1" dirty="0">
                 <a:solidFill>
                   <a:srgbClr val="1E2761"/>
                 </a:solidFill>
@@ -29049,7 +28431,7 @@
               </a:rPr>
               <a:t>Establish tasks and task dependencies</a:t>
             </a:r>
-            <a:endParaRPr lang="en-US" sz="1450" dirty="0"/>
+            <a:endParaRPr lang="en-US" dirty="0"/>
           </a:p>
         </p:txBody>
       </p:sp>
@@ -29129,7 +28511,7 @@
               <a:buNone/>
             </a:pPr>
             <a:r>
-              <a:rPr lang="en-US" sz="1450" b="1" dirty="0">
+              <a:rPr lang="en-US" b="1" dirty="0">
                 <a:solidFill>
                   <a:srgbClr val="1E2761"/>
                 </a:solidFill>
@@ -29139,7 +28521,7 @@
               </a:rPr>
               <a:t>View project information as Gantt or network diagrams</a:t>
             </a:r>
-            <a:endParaRPr lang="en-US" sz="1450" dirty="0"/>
+            <a:endParaRPr lang="en-US" dirty="0"/>
           </a:p>
         </p:txBody>
       </p:sp>
@@ -29179,45 +28561,6 @@
               <a:t>34</a:t>
             </a:r>
             <a:endParaRPr lang="en-US" sz="1000" dirty="0"/>
-          </a:p>
-        </p:txBody>
-      </p:sp>
-      <p:sp>
-        <p:nvSpPr>
-          <p:cNvPr id="15" name="Text 10"/>
-          <p:cNvSpPr/>
-          <p:nvPr/>
-        </p:nvSpPr>
-        <p:spPr>
-          <a:xfrm>
-            <a:off x="548640" y="6400800"/>
-            <a:ext cx="6400800" cy="274320"/>
-          </a:xfrm>
-          <a:prstGeom prst="rect">
-            <a:avLst/>
-          </a:prstGeom>
-          <a:noFill/>
-          <a:ln/>
-        </p:spPr>
-        <p:txBody>
-          <a:bodyPr wrap="square" rtlCol="0" anchor="ctr"/>
-          <a:lstStyle/>
-          <a:p>
-            <a:pPr marL="0" indent="0">
-              <a:buNone/>
-            </a:pPr>
-            <a:r>
-              <a:rPr lang="en-US" sz="900" dirty="0">
-                <a:solidFill>
-                  <a:srgbClr val="6B7A99"/>
-                </a:solidFill>
-                <a:latin typeface="Calibri" pitchFamily="34" charset="0"/>
-                <a:ea typeface="Calibri" pitchFamily="34" charset="-122"/>
-                <a:cs typeface="Calibri" pitchFamily="34" charset="-120"/>
-              </a:rPr>
-              <a:t>Ch. 3 — Managing the Information Systems Project</a:t>
-            </a:r>
-            <a:endParaRPr lang="en-US" sz="900" dirty="0"/>
           </a:p>
         </p:txBody>
       </p:sp>
@@ -29410,7 +28753,7 @@
               <a:buNone/>
             </a:pPr>
             <a:r>
-              <a:rPr lang="en-US" sz="1300" b="1" dirty="0">
+              <a:rPr lang="en-US" b="1" dirty="0">
                 <a:solidFill>
                   <a:srgbClr val="FFFFFF"/>
                 </a:solidFill>
@@ -29420,7 +28763,7 @@
               </a:rPr>
               <a:t>PROJECT INFORMATION</a:t>
             </a:r>
-            <a:endParaRPr lang="en-US" sz="1300" dirty="0"/>
+            <a:endParaRPr lang="en-US" dirty="0"/>
           </a:p>
         </p:txBody>
       </p:sp>
@@ -29500,7 +28843,7 @@
               <a:buNone/>
             </a:pPr>
             <a:r>
-              <a:rPr lang="en-US" sz="1300" dirty="0">
+              <a:rPr lang="en-US" sz="1600" dirty="0">
                 <a:solidFill>
                   <a:srgbClr val="6B7A99"/>
                 </a:solidFill>
@@ -29510,7 +28853,7 @@
               </a:rPr>
               <a:t>Project Start Date</a:t>
             </a:r>
-            <a:endParaRPr lang="en-US" sz="1300" dirty="0"/>
+            <a:endParaRPr lang="en-US" sz="1600" dirty="0"/>
           </a:p>
         </p:txBody>
       </p:sp>
@@ -29608,7 +28951,7 @@
               <a:buNone/>
             </a:pPr>
             <a:r>
-              <a:rPr lang="en-US" sz="1200" dirty="0">
+              <a:rPr lang="en-US" sz="1600" dirty="0">
                 <a:solidFill>
                   <a:srgbClr val="33384A"/>
                 </a:solidFill>
@@ -29618,7 +28961,7 @@
               </a:rPr>
               <a:t>Scheduling mode: Auto  ·  Calendar: Standard (5-day week)</a:t>
             </a:r>
-            <a:endParaRPr lang="en-US" sz="1200" dirty="0"/>
+            <a:endParaRPr lang="en-US" sz="1600" dirty="0"/>
           </a:p>
         </p:txBody>
       </p:sp>
@@ -29676,7 +29019,7 @@
               <a:buNone/>
             </a:pPr>
             <a:r>
-              <a:rPr lang="en-US" sz="1300" b="1" dirty="0">
+              <a:rPr lang="en-US" b="1" dirty="0">
                 <a:solidFill>
                   <a:srgbClr val="141B49"/>
                 </a:solidFill>
@@ -29686,7 +29029,7 @@
               </a:rPr>
               <a:t>Save</a:t>
             </a:r>
-            <a:endParaRPr lang="en-US" sz="1300" dirty="0"/>
+            <a:endParaRPr lang="en-US" dirty="0"/>
           </a:p>
         </p:txBody>
       </p:sp>
@@ -29715,7 +29058,7 @@
               <a:buNone/>
             </a:pPr>
             <a:r>
-              <a:rPr lang="en-US" sz="1250" i="1" dirty="0">
+              <a:rPr lang="en-US" sz="2000" i="1" dirty="0">
                 <a:solidFill>
                   <a:srgbClr val="6B7A99"/>
                 </a:solidFill>
@@ -29725,7 +29068,7 @@
               </a:rPr>
               <a:t>Every schedule anchors to a starting date; the software calculates every other date from there.</a:t>
             </a:r>
-            <a:endParaRPr lang="en-US" sz="1250" dirty="0"/>
+            <a:endParaRPr lang="en-US" sz="2000" dirty="0"/>
           </a:p>
         </p:txBody>
       </p:sp>
@@ -29765,45 +29108,6 @@
               <a:t>35</a:t>
             </a:r>
             <a:endParaRPr lang="en-US" sz="1000" dirty="0"/>
-          </a:p>
-        </p:txBody>
-      </p:sp>
-      <p:sp>
-        <p:nvSpPr>
-          <p:cNvPr id="18" name="Text 15"/>
-          <p:cNvSpPr/>
-          <p:nvPr/>
-        </p:nvSpPr>
-        <p:spPr>
-          <a:xfrm>
-            <a:off x="548640" y="6400800"/>
-            <a:ext cx="6400800" cy="274320"/>
-          </a:xfrm>
-          <a:prstGeom prst="rect">
-            <a:avLst/>
-          </a:prstGeom>
-          <a:noFill/>
-          <a:ln/>
-        </p:spPr>
-        <p:txBody>
-          <a:bodyPr wrap="square" rtlCol="0" anchor="ctr"/>
-          <a:lstStyle/>
-          <a:p>
-            <a:pPr marL="0" indent="0">
-              <a:buNone/>
-            </a:pPr>
-            <a:r>
-              <a:rPr lang="en-US" sz="900" dirty="0">
-                <a:solidFill>
-                  <a:srgbClr val="6B7A99"/>
-                </a:solidFill>
-                <a:latin typeface="Calibri" pitchFamily="34" charset="0"/>
-                <a:ea typeface="Calibri" pitchFamily="34" charset="-122"/>
-                <a:cs typeface="Calibri" pitchFamily="34" charset="-120"/>
-              </a:rPr>
-              <a:t>Ch. 3 — Managing the Information Systems Project</a:t>
-            </a:r>
-            <a:endParaRPr lang="en-US" sz="900" dirty="0"/>
           </a:p>
         </p:txBody>
       </p:sp>
@@ -29888,7 +29192,7 @@
           <p:nvPr>
             <p:extLst>
               <p:ext uri="{D42A27DB-BD31-4B8C-83A1-F6EECF244321}">
-                <p14:modId xmlns:p14="http://schemas.microsoft.com/office/powerpoint/2010/main" val="1579011935"/>
+                <p14:modId xmlns:p14="http://schemas.microsoft.com/office/powerpoint/2010/main" val="1341880915"/>
               </p:ext>
             </p:extLst>
           </p:nvPr>
@@ -29930,18 +29234,18 @@
                     <a:bodyPr/>
                     <a:lstStyle/>
                     <a:p>
-                      <a:pPr marL="0" indent="0" algn="l">
+                      <a:pPr marL="0" indent="0" algn="ctr">
                         <a:buNone/>
                       </a:pPr>
                       <a:r>
-                        <a:rPr lang="en-US" sz="1300" b="1" dirty="0">
+                        <a:rPr lang="en-US" sz="2000" b="1" dirty="0">
                           <a:solidFill>
                             <a:srgbClr val="FFFFFF"/>
                           </a:solidFill>
                         </a:rPr>
                         <a:t>Task Name</a:t>
                       </a:r>
-                      <a:endParaRPr lang="en-US" sz="1300" dirty="0"/>
+                      <a:endParaRPr lang="en-US" sz="2000" dirty="0"/>
                     </a:p>
                   </a:txBody>
                   <a:tcPr>
@@ -29991,18 +29295,18 @@
                     <a:bodyPr/>
                     <a:lstStyle/>
                     <a:p>
-                      <a:pPr marL="0" indent="0" algn="l">
+                      <a:pPr marL="0" indent="0" algn="ctr">
                         <a:buNone/>
                       </a:pPr>
                       <a:r>
-                        <a:rPr lang="en-US" sz="1300" b="1" dirty="0">
+                        <a:rPr lang="en-US" sz="2000" b="1" dirty="0">
                           <a:solidFill>
                             <a:srgbClr val="FFFFFF"/>
                           </a:solidFill>
                         </a:rPr>
                         <a:t>Duration</a:t>
                       </a:r>
-                      <a:endParaRPr lang="en-US" sz="1300" dirty="0"/>
+                      <a:endParaRPr lang="en-US" sz="2000" dirty="0"/>
                     </a:p>
                   </a:txBody>
                   <a:tcPr>
@@ -30052,18 +29356,18 @@
                     <a:bodyPr/>
                     <a:lstStyle/>
                     <a:p>
-                      <a:pPr marL="0" indent="0" algn="l">
+                      <a:pPr marL="0" indent="0" algn="ctr">
                         <a:buNone/>
                       </a:pPr>
                       <a:r>
-                        <a:rPr lang="en-US" sz="1300" b="1" dirty="0">
+                        <a:rPr lang="en-US" sz="2000" b="1" dirty="0">
                           <a:solidFill>
                             <a:srgbClr val="FFFFFF"/>
                           </a:solidFill>
                         </a:rPr>
                         <a:t>Predecessors</a:t>
                       </a:r>
-                      <a:endParaRPr lang="en-US" sz="1300" dirty="0"/>
+                      <a:endParaRPr lang="en-US" sz="2000" dirty="0"/>
                     </a:p>
                   </a:txBody>
                   <a:tcPr>
@@ -30124,14 +29428,14 @@
                         <a:buNone/>
                       </a:pPr>
                       <a:r>
-                        <a:rPr lang="en-US" sz="1250" dirty="0">
+                        <a:rPr lang="en-US" sz="2000" dirty="0">
                           <a:solidFill>
                             <a:srgbClr val="33384A"/>
                           </a:solidFill>
                         </a:rPr>
                         <a:t>1. Define Requirements</a:t>
                       </a:r>
-                      <a:endParaRPr lang="en-US" sz="1250" dirty="0"/>
+                      <a:endParaRPr lang="en-US" sz="2000" dirty="0"/>
                     </a:p>
                   </a:txBody>
                   <a:tcPr>
@@ -30185,14 +29489,14 @@
                         <a:buNone/>
                       </a:pPr>
                       <a:r>
-                        <a:rPr lang="en-US" sz="1250" dirty="0">
+                        <a:rPr lang="en-US" sz="2000" dirty="0">
                           <a:solidFill>
                             <a:srgbClr val="33384A"/>
                           </a:solidFill>
                         </a:rPr>
                         <a:t>6 days</a:t>
                       </a:r>
-                      <a:endParaRPr lang="en-US" sz="1250" dirty="0"/>
+                      <a:endParaRPr lang="en-US" sz="2000" dirty="0"/>
                     </a:p>
                   </a:txBody>
                   <a:tcPr>
@@ -30246,14 +29550,14 @@
                         <a:buNone/>
                       </a:pPr>
                       <a:r>
-                        <a:rPr lang="en-US" sz="1250" dirty="0">
+                        <a:rPr lang="en-US" sz="2000" dirty="0">
                           <a:solidFill>
                             <a:srgbClr val="33384A"/>
                           </a:solidFill>
                         </a:rPr>
                         <a:t>—</a:t>
                       </a:r>
-                      <a:endParaRPr lang="en-US" sz="1250" dirty="0"/>
+                      <a:endParaRPr lang="en-US" sz="2000" dirty="0"/>
                     </a:p>
                   </a:txBody>
                   <a:tcPr>
@@ -30314,14 +29618,14 @@
                         <a:buNone/>
                       </a:pPr>
                       <a:r>
-                        <a:rPr lang="en-US" sz="1250" dirty="0">
+                        <a:rPr lang="en-US" sz="2000" dirty="0">
                           <a:solidFill>
                             <a:srgbClr val="33384A"/>
                           </a:solidFill>
                         </a:rPr>
                         <a:t>2. Design Interview Form</a:t>
                       </a:r>
-                      <a:endParaRPr lang="en-US" sz="1250" dirty="0"/>
+                      <a:endParaRPr lang="en-US" sz="2000" dirty="0"/>
                     </a:p>
                   </a:txBody>
                   <a:tcPr>
@@ -30375,14 +29679,14 @@
                         <a:buNone/>
                       </a:pPr>
                       <a:r>
-                        <a:rPr lang="en-US" sz="1250" dirty="0">
+                        <a:rPr lang="en-US" sz="2000" dirty="0">
                           <a:solidFill>
                             <a:srgbClr val="33384A"/>
                           </a:solidFill>
                         </a:rPr>
                         <a:t>1 day</a:t>
                       </a:r>
-                      <a:endParaRPr lang="en-US" sz="1250" dirty="0"/>
+                      <a:endParaRPr lang="en-US" sz="2000" dirty="0"/>
                     </a:p>
                   </a:txBody>
                   <a:tcPr>
@@ -30436,14 +29740,14 @@
                         <a:buNone/>
                       </a:pPr>
                       <a:r>
-                        <a:rPr lang="en-US" sz="1250" dirty="0">
+                        <a:rPr lang="en-US" sz="2000" dirty="0">
                           <a:solidFill>
                             <a:srgbClr val="33384A"/>
                           </a:solidFill>
                         </a:rPr>
                         <a:t>1</a:t>
                       </a:r>
-                      <a:endParaRPr lang="en-US" sz="1250" dirty="0"/>
+                      <a:endParaRPr lang="en-US" sz="2000" dirty="0"/>
                     </a:p>
                   </a:txBody>
                   <a:tcPr>
@@ -30504,14 +29808,14 @@
                         <a:buNone/>
                       </a:pPr>
                       <a:r>
-                        <a:rPr lang="en-US" sz="1250" dirty="0">
+                        <a:rPr lang="en-US" sz="2000" dirty="0">
                           <a:solidFill>
                             <a:srgbClr val="33384A"/>
                           </a:solidFill>
                         </a:rPr>
                         <a:t>3. Schedule Appointments</a:t>
                       </a:r>
-                      <a:endParaRPr lang="en-US" sz="1250" dirty="0"/>
+                      <a:endParaRPr lang="en-US" sz="2000" dirty="0"/>
                     </a:p>
                   </a:txBody>
                   <a:tcPr>
@@ -30565,14 +29869,14 @@
                         <a:buNone/>
                       </a:pPr>
                       <a:r>
-                        <a:rPr lang="en-US" sz="1250" dirty="0">
+                        <a:rPr lang="en-US" sz="2000" dirty="0">
                           <a:solidFill>
                             <a:srgbClr val="33384A"/>
                           </a:solidFill>
                         </a:rPr>
                         <a:t>1 day</a:t>
                       </a:r>
-                      <a:endParaRPr lang="en-US" sz="1250" dirty="0"/>
+                      <a:endParaRPr lang="en-US" sz="2000" dirty="0"/>
                     </a:p>
                   </a:txBody>
                   <a:tcPr>
@@ -30626,14 +29930,14 @@
                         <a:buNone/>
                       </a:pPr>
                       <a:r>
-                        <a:rPr lang="en-US" sz="1250" dirty="0">
+                        <a:rPr lang="en-US" sz="2000" dirty="0">
                           <a:solidFill>
                             <a:srgbClr val="33384A"/>
                           </a:solidFill>
                         </a:rPr>
                         <a:t>2</a:t>
                       </a:r>
-                      <a:endParaRPr lang="en-US" sz="1250" dirty="0"/>
+                      <a:endParaRPr lang="en-US" sz="2000" dirty="0"/>
                     </a:p>
                   </a:txBody>
                   <a:tcPr>
@@ -30694,14 +29998,14 @@
                         <a:buNone/>
                       </a:pPr>
                       <a:r>
-                        <a:rPr lang="en-US" sz="1250" dirty="0">
+                        <a:rPr lang="en-US" sz="2000" dirty="0">
                           <a:solidFill>
                             <a:srgbClr val="33384A"/>
                           </a:solidFill>
                         </a:rPr>
                         <a:t>4. Conduct Interviews</a:t>
                       </a:r>
-                      <a:endParaRPr lang="en-US" sz="1250" dirty="0"/>
+                      <a:endParaRPr lang="en-US" sz="2000" dirty="0"/>
                     </a:p>
                   </a:txBody>
                   <a:tcPr>
@@ -30755,14 +30059,14 @@
                         <a:buNone/>
                       </a:pPr>
                       <a:r>
-                        <a:rPr lang="en-US" sz="1250" dirty="0">
+                        <a:rPr lang="en-US" sz="2000" dirty="0">
                           <a:solidFill>
                             <a:srgbClr val="33384A"/>
                           </a:solidFill>
                         </a:rPr>
                         <a:t>4 days</a:t>
                       </a:r>
-                      <a:endParaRPr lang="en-US" sz="1250" dirty="0"/>
+                      <a:endParaRPr lang="en-US" sz="2000" dirty="0"/>
                     </a:p>
                   </a:txBody>
                   <a:tcPr>
@@ -30816,14 +30120,14 @@
                         <a:buNone/>
                       </a:pPr>
                       <a:r>
-                        <a:rPr lang="en-US" sz="1250" dirty="0">
+                        <a:rPr lang="en-US" sz="2000" dirty="0">
                           <a:solidFill>
                             <a:srgbClr val="33384A"/>
                           </a:solidFill>
                         </a:rPr>
                         <a:t>3</a:t>
                       </a:r>
-                      <a:endParaRPr lang="en-US" sz="1250" dirty="0"/>
+                      <a:endParaRPr lang="en-US" sz="2000" dirty="0"/>
                     </a:p>
                   </a:txBody>
                   <a:tcPr>
@@ -30884,14 +30188,14 @@
                         <a:buNone/>
                       </a:pPr>
                       <a:r>
-                        <a:rPr lang="en-US" sz="1250" dirty="0">
+                        <a:rPr lang="en-US" sz="2000" dirty="0">
                           <a:solidFill>
                             <a:srgbClr val="33384A"/>
                           </a:solidFill>
                         </a:rPr>
                         <a:t>5. Review Current Reports</a:t>
                       </a:r>
-                      <a:endParaRPr lang="en-US" sz="1250" dirty="0"/>
+                      <a:endParaRPr lang="en-US" sz="2000" dirty="0"/>
                     </a:p>
                   </a:txBody>
                   <a:tcPr>
@@ -30945,14 +30249,14 @@
                         <a:buNone/>
                       </a:pPr>
                       <a:r>
-                        <a:rPr lang="en-US" sz="1250" dirty="0">
+                        <a:rPr lang="en-US" sz="2000" dirty="0">
                           <a:solidFill>
                             <a:srgbClr val="33384A"/>
                           </a:solidFill>
                         </a:rPr>
                         <a:t>2.5 days</a:t>
                       </a:r>
-                      <a:endParaRPr lang="en-US" sz="1250" dirty="0"/>
+                      <a:endParaRPr lang="en-US" sz="2000" dirty="0"/>
                     </a:p>
                   </a:txBody>
                   <a:tcPr>
@@ -31006,14 +30310,14 @@
                         <a:buNone/>
                       </a:pPr>
                       <a:r>
-                        <a:rPr lang="en-US" sz="1250" dirty="0">
+                        <a:rPr lang="en-US" sz="2000" dirty="0">
                           <a:solidFill>
                             <a:srgbClr val="33384A"/>
                           </a:solidFill>
                         </a:rPr>
                         <a:t>1</a:t>
                       </a:r>
-                      <a:endParaRPr lang="en-US" sz="1250" dirty="0"/>
+                      <a:endParaRPr lang="en-US" sz="2000" dirty="0"/>
                     </a:p>
                   </a:txBody>
                   <a:tcPr>
@@ -31074,14 +30378,14 @@
                         <a:buNone/>
                       </a:pPr>
                       <a:r>
-                        <a:rPr lang="en-US" sz="1250" dirty="0">
+                        <a:rPr lang="en-US" sz="2000" dirty="0">
                           <a:solidFill>
                             <a:srgbClr val="33384A"/>
                           </a:solidFill>
                         </a:rPr>
                         <a:t>6. Collect Reports</a:t>
                       </a:r>
-                      <a:endParaRPr lang="en-US" sz="1250" dirty="0"/>
+                      <a:endParaRPr lang="en-US" sz="2000" dirty="0"/>
                     </a:p>
                   </a:txBody>
                   <a:tcPr>
@@ -31135,14 +30439,14 @@
                         <a:buNone/>
                       </a:pPr>
                       <a:r>
-                        <a:rPr lang="en-US" sz="1250" dirty="0">
+                        <a:rPr lang="en-US" sz="2000" dirty="0">
                           <a:solidFill>
                             <a:srgbClr val="33384A"/>
                           </a:solidFill>
                         </a:rPr>
                         <a:t>0.5 days</a:t>
                       </a:r>
-                      <a:endParaRPr lang="en-US" sz="1250" dirty="0"/>
+                      <a:endParaRPr lang="en-US" sz="2000" dirty="0"/>
                     </a:p>
                   </a:txBody>
                   <a:tcPr>
@@ -31196,14 +30500,14 @@
                         <a:buNone/>
                       </a:pPr>
                       <a:r>
-                        <a:rPr lang="en-US" sz="1250" dirty="0">
+                        <a:rPr lang="en-US" sz="2000" dirty="0">
                           <a:solidFill>
                             <a:srgbClr val="33384A"/>
                           </a:solidFill>
                         </a:rPr>
                         <a:t>1</a:t>
                       </a:r>
-                      <a:endParaRPr lang="en-US" sz="1250" dirty="0"/>
+                      <a:endParaRPr lang="en-US" sz="2000" dirty="0"/>
                     </a:p>
                   </a:txBody>
                   <a:tcPr>
@@ -31264,14 +30568,14 @@
                         <a:buNone/>
                       </a:pPr>
                       <a:r>
-                        <a:rPr lang="en-US" sz="1250" dirty="0">
+                        <a:rPr lang="en-US" sz="2000" dirty="0">
                           <a:solidFill>
                             <a:srgbClr val="33384A"/>
                           </a:solidFill>
                         </a:rPr>
                         <a:t>7. Summarize Results</a:t>
                       </a:r>
-                      <a:endParaRPr lang="en-US" sz="1250" dirty="0"/>
+                      <a:endParaRPr lang="en-US" sz="2000" dirty="0"/>
                     </a:p>
                   </a:txBody>
                   <a:tcPr>
@@ -31325,14 +30629,14 @@
                         <a:buNone/>
                       </a:pPr>
                       <a:r>
-                        <a:rPr lang="en-US" sz="1250" dirty="0">
+                        <a:rPr lang="en-US" sz="2000" dirty="0">
                           <a:solidFill>
                             <a:srgbClr val="33384A"/>
                           </a:solidFill>
                         </a:rPr>
                         <a:t>2 days</a:t>
                       </a:r>
-                      <a:endParaRPr lang="en-US" sz="1250" dirty="0"/>
+                      <a:endParaRPr lang="en-US" sz="2000" dirty="0"/>
                     </a:p>
                   </a:txBody>
                   <a:tcPr>
@@ -31386,14 +30690,14 @@
                         <a:buNone/>
                       </a:pPr>
                       <a:r>
-                        <a:rPr lang="en-US" sz="1250" dirty="0">
+                        <a:rPr lang="en-US" sz="2000" dirty="0">
                           <a:solidFill>
                             <a:srgbClr val="33384A"/>
                           </a:solidFill>
                         </a:rPr>
                         <a:t>4, 6</a:t>
                       </a:r>
-                      <a:endParaRPr lang="en-US" sz="1250" dirty="0"/>
+                      <a:endParaRPr lang="en-US" sz="2000" dirty="0"/>
                     </a:p>
                   </a:txBody>
                   <a:tcPr>
@@ -31473,7 +30777,7 @@
               <a:buNone/>
             </a:pPr>
             <a:r>
-              <a:rPr lang="en-US" sz="1250" i="1" dirty="0">
+              <a:rPr lang="en-US" sz="1600" i="1" dirty="0">
                 <a:solidFill>
                   <a:srgbClr val="6B7A99"/>
                 </a:solidFill>
@@ -31483,7 +30787,7 @@
               </a:rPr>
               <a:t>Once tasks, durations, and predecessors are entered, the software builds the Gantt and network views automatically.</a:t>
             </a:r>
-            <a:endParaRPr lang="en-US" sz="1250" dirty="0"/>
+            <a:endParaRPr lang="en-US" sz="1600" dirty="0"/>
           </a:p>
         </p:txBody>
       </p:sp>
@@ -31523,45 +30827,6 @@
               <a:t>36</a:t>
             </a:r>
             <a:endParaRPr lang="en-US" sz="1000" dirty="0"/>
-          </a:p>
-        </p:txBody>
-      </p:sp>
-      <p:sp>
-        <p:nvSpPr>
-          <p:cNvPr id="7" name="Text 4"/>
-          <p:cNvSpPr/>
-          <p:nvPr/>
-        </p:nvSpPr>
-        <p:spPr>
-          <a:xfrm>
-            <a:off x="548640" y="6400800"/>
-            <a:ext cx="6400800" cy="274320"/>
-          </a:xfrm>
-          <a:prstGeom prst="rect">
-            <a:avLst/>
-          </a:prstGeom>
-          <a:noFill/>
-          <a:ln/>
-        </p:spPr>
-        <p:txBody>
-          <a:bodyPr wrap="square" rtlCol="0" anchor="ctr"/>
-          <a:lstStyle/>
-          <a:p>
-            <a:pPr marL="0" indent="0">
-              <a:buNone/>
-            </a:pPr>
-            <a:r>
-              <a:rPr lang="en-US" sz="900" dirty="0">
-                <a:solidFill>
-                  <a:srgbClr val="6B7A99"/>
-                </a:solidFill>
-                <a:latin typeface="Calibri" pitchFamily="34" charset="0"/>
-                <a:ea typeface="Calibri" pitchFamily="34" charset="-122"/>
-                <a:cs typeface="Calibri" pitchFamily="34" charset="-120"/>
-              </a:rPr>
-              <a:t>Ch. 3 — Managing the Information Systems Project</a:t>
-            </a:r>
-            <a:endParaRPr lang="en-US" sz="900" dirty="0"/>
           </a:p>
         </p:txBody>
       </p:sp>
@@ -31947,7 +31212,7 @@
               <a:buNone/>
             </a:pPr>
             <a:r>
-              <a:rPr lang="en-US" sz="950" b="1" dirty="0">
+              <a:rPr lang="en-US" sz="1200" b="1" dirty="0">
                 <a:solidFill>
                   <a:srgbClr val="FFFFFF"/>
                 </a:solidFill>
@@ -31957,7 +31222,7 @@
               </a:rPr>
               <a:t>Define</a:t>
             </a:r>
-            <a:endParaRPr lang="en-US" sz="950" dirty="0"/>
+            <a:endParaRPr lang="en-US" sz="1200" dirty="0"/>
           </a:p>
           <a:p>
             <a:pPr marL="0" indent="0" algn="ctr">
@@ -31967,7 +31232,7 @@
               <a:buNone/>
             </a:pPr>
             <a:r>
-              <a:rPr lang="en-US" sz="950" b="1" dirty="0">
+              <a:rPr lang="en-US" sz="1200" b="1" dirty="0">
                 <a:solidFill>
                   <a:srgbClr val="FFFFFF"/>
                 </a:solidFill>
@@ -31977,7 +31242,7 @@
               </a:rPr>
               <a:t>Requirements</a:t>
             </a:r>
-            <a:endParaRPr lang="en-US" sz="950" dirty="0"/>
+            <a:endParaRPr lang="en-US" sz="1200" dirty="0"/>
           </a:p>
         </p:txBody>
       </p:sp>
@@ -32043,7 +31308,7 @@
               <a:buNone/>
             </a:pPr>
             <a:r>
-              <a:rPr lang="en-US" sz="950" b="1" dirty="0">
+              <a:rPr lang="en-US" sz="1400" b="1" dirty="0">
                 <a:solidFill>
                   <a:srgbClr val="FFFFFF"/>
                 </a:solidFill>
@@ -32053,7 +31318,7 @@
               </a:rPr>
               <a:t>Design</a:t>
             </a:r>
-            <a:endParaRPr lang="en-US" sz="950" dirty="0"/>
+            <a:endParaRPr lang="en-US" sz="1400" dirty="0"/>
           </a:p>
           <a:p>
             <a:pPr marL="0" indent="0" algn="ctr">
@@ -32063,7 +31328,7 @@
               <a:buNone/>
             </a:pPr>
             <a:r>
-              <a:rPr lang="en-US" sz="950" b="1" dirty="0">
+              <a:rPr lang="en-US" sz="1400" b="1" dirty="0">
                 <a:solidFill>
                   <a:srgbClr val="FFFFFF"/>
                 </a:solidFill>
@@ -32073,7 +31338,7 @@
               </a:rPr>
               <a:t>Interview Form</a:t>
             </a:r>
-            <a:endParaRPr lang="en-US" sz="950" dirty="0"/>
+            <a:endParaRPr lang="en-US" sz="1400" dirty="0"/>
           </a:p>
         </p:txBody>
       </p:sp>
@@ -32139,7 +31404,7 @@
               <a:buNone/>
             </a:pPr>
             <a:r>
-              <a:rPr lang="en-US" sz="950" b="1" dirty="0">
+              <a:rPr lang="en-US" sz="1600" b="1" dirty="0">
                 <a:solidFill>
                   <a:srgbClr val="FFFFFF"/>
                 </a:solidFill>
@@ -32149,7 +31414,7 @@
               </a:rPr>
               <a:t>Review</a:t>
             </a:r>
-            <a:endParaRPr lang="en-US" sz="950" dirty="0"/>
+            <a:endParaRPr lang="en-US" sz="1600" dirty="0"/>
           </a:p>
           <a:p>
             <a:pPr marL="0" indent="0" algn="ctr">
@@ -32159,7 +31424,7 @@
               <a:buNone/>
             </a:pPr>
             <a:r>
-              <a:rPr lang="en-US" sz="950" b="1" dirty="0">
+              <a:rPr lang="en-US" sz="1600" b="1" dirty="0">
                 <a:solidFill>
                   <a:srgbClr val="FFFFFF"/>
                 </a:solidFill>
@@ -32169,7 +31434,7 @@
               </a:rPr>
               <a:t>Reports</a:t>
             </a:r>
-            <a:endParaRPr lang="en-US" sz="950" dirty="0"/>
+            <a:endParaRPr lang="en-US" sz="1600" dirty="0"/>
           </a:p>
         </p:txBody>
       </p:sp>
@@ -32181,7 +31446,7 @@
         </p:nvSpPr>
         <p:spPr>
           <a:xfrm>
-            <a:off x="5833872" y="1609344"/>
+            <a:off x="5890019" y="1609344"/>
             <a:ext cx="1133856" cy="731520"/>
           </a:xfrm>
           <a:prstGeom prst="roundRect">
@@ -32215,8 +31480,8 @@
         </p:nvSpPr>
         <p:spPr>
           <a:xfrm>
-            <a:off x="5833872" y="1609344"/>
-            <a:ext cx="1133856" cy="731520"/>
+            <a:off x="5833871" y="1609344"/>
+            <a:ext cx="1248717" cy="731520"/>
           </a:xfrm>
           <a:prstGeom prst="rect">
             <a:avLst/>
@@ -32235,7 +31500,7 @@
               <a:buNone/>
             </a:pPr>
             <a:r>
-              <a:rPr lang="en-US" sz="950" b="1" dirty="0">
+              <a:rPr lang="en-US" sz="1400" b="1" dirty="0">
                 <a:solidFill>
                   <a:srgbClr val="FFFFFF"/>
                 </a:solidFill>
@@ -32245,7 +31510,7 @@
               </a:rPr>
               <a:t>Schedule</a:t>
             </a:r>
-            <a:endParaRPr lang="en-US" sz="950" dirty="0"/>
+            <a:endParaRPr lang="en-US" sz="1400" dirty="0"/>
           </a:p>
           <a:p>
             <a:pPr marL="0" indent="0" algn="ctr">
@@ -32255,7 +31520,7 @@
               <a:buNone/>
             </a:pPr>
             <a:r>
-              <a:rPr lang="en-US" sz="950" b="1" dirty="0">
+              <a:rPr lang="en-US" sz="1400" b="1" dirty="0">
                 <a:solidFill>
                   <a:srgbClr val="FFFFFF"/>
                 </a:solidFill>
@@ -32265,7 +31530,7 @@
               </a:rPr>
               <a:t>Appointments</a:t>
             </a:r>
-            <a:endParaRPr lang="en-US" sz="950" dirty="0"/>
+            <a:endParaRPr lang="en-US" sz="1400" dirty="0"/>
           </a:p>
         </p:txBody>
       </p:sp>
@@ -32331,7 +31596,7 @@
               <a:buNone/>
             </a:pPr>
             <a:r>
-              <a:rPr lang="en-US" sz="950" b="1" dirty="0">
+              <a:rPr lang="en-US" sz="1400" b="1" dirty="0">
                 <a:solidFill>
                   <a:srgbClr val="FFFFFF"/>
                 </a:solidFill>
@@ -32341,7 +31606,7 @@
               </a:rPr>
               <a:t>Collect</a:t>
             </a:r>
-            <a:endParaRPr lang="en-US" sz="950" dirty="0"/>
+            <a:endParaRPr lang="en-US" sz="1400" dirty="0"/>
           </a:p>
           <a:p>
             <a:pPr marL="0" indent="0" algn="ctr">
@@ -32351,7 +31616,7 @@
               <a:buNone/>
             </a:pPr>
             <a:r>
-              <a:rPr lang="en-US" sz="950" b="1" dirty="0">
+              <a:rPr lang="en-US" sz="1400" b="1" dirty="0">
                 <a:solidFill>
                   <a:srgbClr val="FFFFFF"/>
                 </a:solidFill>
@@ -32361,7 +31626,7 @@
               </a:rPr>
               <a:t>Reports</a:t>
             </a:r>
-            <a:endParaRPr lang="en-US" sz="950" dirty="0"/>
+            <a:endParaRPr lang="en-US" sz="1400" dirty="0"/>
           </a:p>
         </p:txBody>
       </p:sp>
@@ -32427,7 +31692,7 @@
               <a:buNone/>
             </a:pPr>
             <a:r>
-              <a:rPr lang="en-US" sz="950" b="1" dirty="0">
+              <a:rPr lang="en-US" sz="1600" b="1" dirty="0">
                 <a:solidFill>
                   <a:srgbClr val="FFFFFF"/>
                 </a:solidFill>
@@ -32437,7 +31702,7 @@
               </a:rPr>
               <a:t>Conduct</a:t>
             </a:r>
-            <a:endParaRPr lang="en-US" sz="950" dirty="0"/>
+            <a:endParaRPr lang="en-US" sz="1600" dirty="0"/>
           </a:p>
           <a:p>
             <a:pPr marL="0" indent="0" algn="ctr">
@@ -32447,7 +31712,7 @@
               <a:buNone/>
             </a:pPr>
             <a:r>
-              <a:rPr lang="en-US" sz="950" b="1" dirty="0">
+              <a:rPr lang="en-US" sz="1600" b="1" dirty="0">
                 <a:solidFill>
                   <a:srgbClr val="FFFFFF"/>
                 </a:solidFill>
@@ -32457,7 +31722,7 @@
               </a:rPr>
               <a:t>Interviews</a:t>
             </a:r>
-            <a:endParaRPr lang="en-US" sz="950" dirty="0"/>
+            <a:endParaRPr lang="en-US" sz="1600" dirty="0"/>
           </a:p>
         </p:txBody>
       </p:sp>
@@ -32523,7 +31788,7 @@
               <a:buNone/>
             </a:pPr>
             <a:r>
-              <a:rPr lang="en-US" sz="950" b="1" dirty="0">
+              <a:rPr lang="en-US" sz="1600" b="1" dirty="0">
                 <a:solidFill>
                   <a:srgbClr val="FFFFFF"/>
                 </a:solidFill>
@@ -32533,7 +31798,7 @@
               </a:rPr>
               <a:t>Summarize</a:t>
             </a:r>
-            <a:endParaRPr lang="en-US" sz="950" dirty="0"/>
+            <a:endParaRPr lang="en-US" sz="1600" dirty="0"/>
           </a:p>
           <a:p>
             <a:pPr marL="0" indent="0" algn="ctr">
@@ -32543,7 +31808,7 @@
               <a:buNone/>
             </a:pPr>
             <a:r>
-              <a:rPr lang="en-US" sz="950" b="1" dirty="0">
+              <a:rPr lang="en-US" sz="1600" b="1" dirty="0">
                 <a:solidFill>
                   <a:srgbClr val="FFFFFF"/>
                 </a:solidFill>
@@ -32553,7 +31818,7 @@
               </a:rPr>
               <a:t>Results</a:t>
             </a:r>
-            <a:endParaRPr lang="en-US" sz="950" dirty="0"/>
+            <a:endParaRPr lang="en-US" sz="1600" dirty="0"/>
           </a:p>
         </p:txBody>
       </p:sp>
@@ -32612,7 +31877,7 @@
               <a:buNone/>
             </a:pPr>
             <a:r>
-              <a:rPr lang="en-US" sz="950" b="1" dirty="0">
+              <a:rPr lang="en-US" sz="1600" b="1" dirty="0">
                 <a:solidFill>
                   <a:srgbClr val="141B49"/>
                 </a:solidFill>
@@ -32622,7 +31887,7 @@
               </a:rPr>
               <a:t>Milestone:</a:t>
             </a:r>
-            <a:endParaRPr lang="en-US" sz="950" dirty="0"/>
+            <a:endParaRPr lang="en-US" sz="1600" dirty="0"/>
           </a:p>
           <a:p>
             <a:pPr marL="0" indent="0" algn="ctr">
@@ -32632,7 +31897,7 @@
               <a:buNone/>
             </a:pPr>
             <a:r>
-              <a:rPr lang="en-US" sz="950" b="1" dirty="0">
+              <a:rPr lang="en-US" sz="1600" b="1" dirty="0">
                 <a:solidFill>
                   <a:srgbClr val="141B49"/>
                 </a:solidFill>
@@ -32642,7 +31907,7 @@
               </a:rPr>
               <a:t>Complete</a:t>
             </a:r>
-            <a:endParaRPr lang="en-US" sz="950" dirty="0"/>
+            <a:endParaRPr lang="en-US" sz="1600" dirty="0"/>
           </a:p>
         </p:txBody>
       </p:sp>
@@ -32698,7 +31963,7 @@
               <a:buNone/>
             </a:pPr>
             <a:r>
-              <a:rPr lang="en-US" sz="1200" dirty="0">
+              <a:rPr lang="en-US" sz="1600" dirty="0">
                 <a:solidFill>
                   <a:srgbClr val="33384A"/>
                 </a:solidFill>
@@ -32708,7 +31973,7 @@
               </a:rPr>
               <a:t>Milestone</a:t>
             </a:r>
-            <a:endParaRPr lang="en-US" sz="1200" dirty="0"/>
+            <a:endParaRPr lang="en-US" sz="1600" dirty="0"/>
           </a:p>
         </p:txBody>
       </p:sp>
@@ -32767,7 +32032,7 @@
               <a:buNone/>
             </a:pPr>
             <a:r>
-              <a:rPr lang="en-US" sz="1200" dirty="0">
+              <a:rPr lang="en-US" sz="1600" dirty="0">
                 <a:solidFill>
                   <a:srgbClr val="33384A"/>
                 </a:solidFill>
@@ -32777,7 +32042,7 @@
               </a:rPr>
               <a:t>Critical path (no slack)</a:t>
             </a:r>
-            <a:endParaRPr lang="en-US" sz="1200" dirty="0"/>
+            <a:endParaRPr lang="en-US" sz="1600" dirty="0"/>
           </a:p>
         </p:txBody>
       </p:sp>
@@ -32817,45 +32082,6 @@
               <a:t>37</a:t>
             </a:r>
             <a:endParaRPr lang="en-US" sz="1000" dirty="0"/>
-          </a:p>
-        </p:txBody>
-      </p:sp>
-      <p:sp>
-        <p:nvSpPr>
-          <p:cNvPr id="33" name="Text 31"/>
-          <p:cNvSpPr/>
-          <p:nvPr/>
-        </p:nvSpPr>
-        <p:spPr>
-          <a:xfrm>
-            <a:off x="548640" y="6400800"/>
-            <a:ext cx="6400800" cy="274320"/>
-          </a:xfrm>
-          <a:prstGeom prst="rect">
-            <a:avLst/>
-          </a:prstGeom>
-          <a:noFill/>
-          <a:ln/>
-        </p:spPr>
-        <p:txBody>
-          <a:bodyPr wrap="square" rtlCol="0" anchor="ctr"/>
-          <a:lstStyle/>
-          <a:p>
-            <a:pPr marL="0" indent="0">
-              <a:buNone/>
-            </a:pPr>
-            <a:r>
-              <a:rPr lang="en-US" sz="900" dirty="0">
-                <a:solidFill>
-                  <a:srgbClr val="6B7A99"/>
-                </a:solidFill>
-                <a:latin typeface="Calibri" pitchFamily="34" charset="0"/>
-                <a:ea typeface="Calibri" pitchFamily="34" charset="-122"/>
-                <a:cs typeface="Calibri" pitchFamily="34" charset="-120"/>
-              </a:rPr>
-              <a:t>Ch. 3 — Managing the Information Systems Project</a:t>
-            </a:r>
-            <a:endParaRPr lang="en-US" sz="900" dirty="0"/>
           </a:p>
         </p:txBody>
       </p:sp>
@@ -33508,7 +32734,7 @@
               <a:buNone/>
             </a:pPr>
             <a:r>
-              <a:rPr lang="en-US" sz="1100" dirty="0">
+              <a:rPr lang="en-US" sz="1600" dirty="0">
                 <a:solidFill>
                   <a:srgbClr val="33384A"/>
                 </a:solidFill>
@@ -33518,7 +32744,7 @@
               </a:rPr>
               <a:t>Purchasing Overview</a:t>
             </a:r>
-            <a:endParaRPr lang="en-US" sz="1100" dirty="0"/>
+            <a:endParaRPr lang="en-US" sz="1600" dirty="0"/>
           </a:p>
         </p:txBody>
       </p:sp>
@@ -33603,7 +32829,7 @@
               <a:buNone/>
             </a:pPr>
             <a:r>
-              <a:rPr lang="en-US" sz="1100" dirty="0">
+              <a:rPr lang="en-US" sz="1600" dirty="0">
                 <a:solidFill>
                   <a:srgbClr val="33384A"/>
                 </a:solidFill>
@@ -33613,7 +32839,7 @@
               </a:rPr>
               <a:t>Define Requirements</a:t>
             </a:r>
-            <a:endParaRPr lang="en-US" sz="1100" dirty="0"/>
+            <a:endParaRPr lang="en-US" sz="1600" dirty="0"/>
           </a:p>
         </p:txBody>
       </p:sp>
@@ -33700,7 +32926,7 @@
               <a:buNone/>
             </a:pPr>
             <a:r>
-              <a:rPr lang="en-US" sz="1100" dirty="0">
+              <a:rPr lang="en-US" sz="1600" dirty="0">
                 <a:solidFill>
                   <a:srgbClr val="33384A"/>
                 </a:solidFill>
@@ -33710,7 +32936,7 @@
               </a:rPr>
               <a:t>Design Interview Form</a:t>
             </a:r>
-            <a:endParaRPr lang="en-US" sz="1100" dirty="0"/>
+            <a:endParaRPr lang="en-US" sz="1600" dirty="0"/>
           </a:p>
         </p:txBody>
       </p:sp>
@@ -33797,7 +33023,7 @@
               <a:buNone/>
             </a:pPr>
             <a:r>
-              <a:rPr lang="en-US" sz="1100" dirty="0">
+              <a:rPr lang="en-US" sz="1600" dirty="0">
                 <a:solidFill>
                   <a:srgbClr val="33384A"/>
                 </a:solidFill>
@@ -33807,7 +33033,7 @@
               </a:rPr>
               <a:t>Conduct Interviews</a:t>
             </a:r>
-            <a:endParaRPr lang="en-US" sz="1100" dirty="0"/>
+            <a:endParaRPr lang="en-US" sz="1600" dirty="0"/>
           </a:p>
         </p:txBody>
       </p:sp>
@@ -33894,7 +33120,7 @@
               <a:buNone/>
             </a:pPr>
             <a:r>
-              <a:rPr lang="en-US" sz="1100" dirty="0">
+              <a:rPr lang="en-US" sz="1600" dirty="0">
                 <a:solidFill>
                   <a:srgbClr val="33384A"/>
                 </a:solidFill>
@@ -33904,7 +33130,7 @@
               </a:rPr>
               <a:t>Review Current Reports</a:t>
             </a:r>
-            <a:endParaRPr lang="en-US" sz="1100" dirty="0"/>
+            <a:endParaRPr lang="en-US" sz="1600" dirty="0"/>
           </a:p>
         </p:txBody>
       </p:sp>
@@ -33962,7 +33188,7 @@
               <a:buNone/>
             </a:pPr>
             <a:r>
-              <a:rPr lang="en-US" sz="1100" dirty="0">
+              <a:rPr lang="en-US" sz="1600" dirty="0">
                 <a:solidFill>
                   <a:srgbClr val="33384A"/>
                 </a:solidFill>
@@ -33972,7 +33198,7 @@
               </a:rPr>
               <a:t>Project Kickoff</a:t>
             </a:r>
-            <a:endParaRPr lang="en-US" sz="1100" dirty="0"/>
+            <a:endParaRPr lang="en-US" sz="1600" dirty="0"/>
           </a:p>
         </p:txBody>
       </p:sp>
@@ -34086,7 +33312,7 @@
               <a:buNone/>
             </a:pPr>
             <a:r>
-              <a:rPr lang="en-US" sz="1150" dirty="0">
+              <a:rPr lang="en-US" sz="1600" dirty="0">
                 <a:solidFill>
                   <a:srgbClr val="33384A"/>
                 </a:solidFill>
@@ -34096,7 +33322,7 @@
               </a:rPr>
               <a:t>Summary activity</a:t>
             </a:r>
-            <a:endParaRPr lang="en-US" sz="1150" dirty="0"/>
+            <a:endParaRPr lang="en-US" sz="1600" dirty="0"/>
           </a:p>
         </p:txBody>
       </p:sp>
@@ -34154,7 +33380,7 @@
               <a:buNone/>
             </a:pPr>
             <a:r>
-              <a:rPr lang="en-US" sz="1150" dirty="0">
+              <a:rPr lang="en-US" sz="1600" dirty="0">
                 <a:solidFill>
                   <a:srgbClr val="33384A"/>
                 </a:solidFill>
@@ -34164,7 +33390,7 @@
               </a:rPr>
               <a:t>Critical path</a:t>
             </a:r>
-            <a:endParaRPr lang="en-US" sz="1150" dirty="0"/>
+            <a:endParaRPr lang="en-US" sz="1600" dirty="0"/>
           </a:p>
         </p:txBody>
       </p:sp>
@@ -34222,7 +33448,7 @@
               <a:buNone/>
             </a:pPr>
             <a:r>
-              <a:rPr lang="en-US" sz="1150" dirty="0">
+              <a:rPr lang="en-US" sz="1600" dirty="0">
                 <a:solidFill>
                   <a:srgbClr val="33384A"/>
                 </a:solidFill>
@@ -34232,7 +33458,7 @@
               </a:rPr>
               <a:t>Percent complete</a:t>
             </a:r>
-            <a:endParaRPr lang="en-US" sz="1150" dirty="0"/>
+            <a:endParaRPr lang="en-US" sz="1600" dirty="0"/>
           </a:p>
         </p:txBody>
       </p:sp>
@@ -34288,7 +33514,7 @@
               <a:buNone/>
             </a:pPr>
             <a:r>
-              <a:rPr lang="en-US" sz="1150" dirty="0">
+              <a:rPr lang="en-US" sz="1600" dirty="0">
                 <a:solidFill>
                   <a:srgbClr val="33384A"/>
                 </a:solidFill>
@@ -34298,7 +33524,7 @@
               </a:rPr>
               <a:t>Milestone</a:t>
             </a:r>
-            <a:endParaRPr lang="en-US" sz="1150" dirty="0"/>
+            <a:endParaRPr lang="en-US" sz="1600" dirty="0"/>
           </a:p>
         </p:txBody>
       </p:sp>
@@ -34338,45 +33564,6 @@
               <a:t>38</a:t>
             </a:r>
             <a:endParaRPr lang="en-US" sz="1000" dirty="0"/>
-          </a:p>
-        </p:txBody>
-      </p:sp>
-      <p:sp>
-        <p:nvSpPr>
-          <p:cNvPr id="46" name="Text 44"/>
-          <p:cNvSpPr/>
-          <p:nvPr/>
-        </p:nvSpPr>
-        <p:spPr>
-          <a:xfrm>
-            <a:off x="548640" y="6400800"/>
-            <a:ext cx="6400800" cy="274320"/>
-          </a:xfrm>
-          <a:prstGeom prst="rect">
-            <a:avLst/>
-          </a:prstGeom>
-          <a:noFill/>
-          <a:ln/>
-        </p:spPr>
-        <p:txBody>
-          <a:bodyPr wrap="square" rtlCol="0" anchor="ctr"/>
-          <a:lstStyle/>
-          <a:p>
-            <a:pPr marL="0" indent="0">
-              <a:buNone/>
-            </a:pPr>
-            <a:r>
-              <a:rPr lang="en-US" sz="900" dirty="0">
-                <a:solidFill>
-                  <a:srgbClr val="6B7A99"/>
-                </a:solidFill>
-                <a:latin typeface="Calibri" pitchFamily="34" charset="0"/>
-                <a:ea typeface="Calibri" pitchFamily="34" charset="-122"/>
-                <a:cs typeface="Calibri" pitchFamily="34" charset="-120"/>
-              </a:rPr>
-              <a:t>Ch. 3 — Managing the Information Systems Project</a:t>
-            </a:r>
-            <a:endParaRPr lang="en-US" sz="900" dirty="0"/>
           </a:p>
         </p:txBody>
       </p:sp>
@@ -34415,45 +33602,6 @@
       </p:grpSpPr>
       <p:sp>
         <p:nvSpPr>
-          <p:cNvPr id="2" name="Text 0"/>
-          <p:cNvSpPr/>
-          <p:nvPr/>
-        </p:nvSpPr>
-        <p:spPr>
-          <a:xfrm>
-            <a:off x="548640" y="502920"/>
-            <a:ext cx="9144000" cy="274320"/>
-          </a:xfrm>
-          <a:prstGeom prst="rect">
-            <a:avLst/>
-          </a:prstGeom>
-          <a:noFill/>
-          <a:ln/>
-        </p:spPr>
-        <p:txBody>
-          <a:bodyPr wrap="square" rtlCol="0" anchor="ctr"/>
-          <a:lstStyle/>
-          <a:p>
-            <a:pPr marL="0" indent="0">
-              <a:buNone/>
-            </a:pPr>
-            <a:r>
-              <a:rPr lang="en-US" sz="1200" b="1" kern="0" spc="150" dirty="0">
-                <a:solidFill>
-                  <a:srgbClr val="CADCFC"/>
-                </a:solidFill>
-                <a:latin typeface="Calibri" pitchFamily="34" charset="0"/>
-                <a:ea typeface="Calibri" pitchFamily="34" charset="-122"/>
-                <a:cs typeface="Calibri" pitchFamily="34" charset="-120"/>
-              </a:rPr>
-              <a:t>CHAPTER RECAP</a:t>
-            </a:r>
-            <a:endParaRPr lang="en-US" sz="1200" dirty="0"/>
-          </a:p>
-        </p:txBody>
-      </p:sp>
-      <p:sp>
-        <p:nvSpPr>
           <p:cNvPr id="3" name="Text 1"/>
           <p:cNvSpPr/>
           <p:nvPr/>
@@ -34567,7 +33715,7 @@
               <a:buNone/>
             </a:pPr>
             <a:r>
-              <a:rPr lang="en-US" sz="1550" dirty="0">
+              <a:rPr lang="en-US" sz="2000" dirty="0">
                 <a:solidFill>
                   <a:srgbClr val="CADCFC"/>
                 </a:solidFill>
@@ -34577,7 +33725,7 @@
               </a:rPr>
               <a:t>How information systems projects are managed from initiation through closedown.</a:t>
             </a:r>
-            <a:endParaRPr lang="en-US" sz="1550" dirty="0"/>
+            <a:endParaRPr lang="en-US" sz="2000" dirty="0"/>
           </a:p>
         </p:txBody>
       </p:sp>
@@ -34657,7 +33805,7 @@
               <a:buNone/>
             </a:pPr>
             <a:r>
-              <a:rPr lang="en-US" sz="1550" dirty="0">
+              <a:rPr lang="en-US" sz="2000" dirty="0">
                 <a:solidFill>
                   <a:srgbClr val="CADCFC"/>
                 </a:solidFill>
@@ -34667,7 +33815,7 @@
               </a:rPr>
               <a:t>The skills an effective project manager needs.</a:t>
             </a:r>
-            <a:endParaRPr lang="en-US" sz="1550" dirty="0"/>
+            <a:endParaRPr lang="en-US" sz="2000" dirty="0"/>
           </a:p>
         </p:txBody>
       </p:sp>
@@ -34747,7 +33895,7 @@
               <a:buNone/>
             </a:pPr>
             <a:r>
-              <a:rPr lang="en-US" sz="1550" dirty="0">
+              <a:rPr lang="en-US" sz="2000" dirty="0">
                 <a:solidFill>
                   <a:srgbClr val="CADCFC"/>
                 </a:solidFill>
@@ -34757,7 +33905,7 @@
               </a:rPr>
               <a:t>The project manager's activities across each of the four PM phases.</a:t>
             </a:r>
-            <a:endParaRPr lang="en-US" sz="1550" dirty="0"/>
+            <a:endParaRPr lang="en-US" sz="2000" dirty="0"/>
           </a:p>
         </p:txBody>
       </p:sp>
@@ -34837,7 +33985,7 @@
               <a:buNone/>
             </a:pPr>
             <a:r>
-              <a:rPr lang="en-US" sz="1550" dirty="0">
+              <a:rPr lang="en-US" sz="2000" dirty="0">
                 <a:solidFill>
                   <a:srgbClr val="CADCFC"/>
                 </a:solidFill>
@@ -34847,7 +33995,7 @@
               </a:rPr>
               <a:t>Critical path scheduling, and how to build Gantt charts and network diagrams.</a:t>
             </a:r>
-            <a:endParaRPr lang="en-US" sz="1550" dirty="0"/>
+            <a:endParaRPr lang="en-US" sz="2000" dirty="0"/>
           </a:p>
         </p:txBody>
       </p:sp>
@@ -34927,7 +34075,7 @@
               <a:buNone/>
             </a:pPr>
             <a:r>
-              <a:rPr lang="en-US" sz="1550" dirty="0">
+              <a:rPr lang="en-US" sz="2000" dirty="0">
                 <a:solidFill>
                   <a:srgbClr val="CADCFC"/>
                 </a:solidFill>
@@ -34937,46 +34085,7 @@
               </a:rPr>
               <a:t>How project management software supports scheduling and tracking.</a:t>
             </a:r>
-            <a:endParaRPr lang="en-US" sz="1550" dirty="0"/>
-          </a:p>
-        </p:txBody>
-      </p:sp>
-      <p:sp>
-        <p:nvSpPr>
-          <p:cNvPr id="19" name="Text 12"/>
-          <p:cNvSpPr/>
-          <p:nvPr/>
-        </p:nvSpPr>
-        <p:spPr>
-          <a:xfrm>
-            <a:off x="548640" y="5806440"/>
-            <a:ext cx="5486400" cy="457200"/>
-          </a:xfrm>
-          <a:prstGeom prst="rect">
-            <a:avLst/>
-          </a:prstGeom>
-          <a:noFill/>
-          <a:ln/>
-        </p:spPr>
-        <p:txBody>
-          <a:bodyPr wrap="square" rtlCol="0" anchor="ctr"/>
-          <a:lstStyle/>
-          <a:p>
-            <a:pPr marL="0" indent="0">
-              <a:buNone/>
-            </a:pPr>
-            <a:r>
-              <a:rPr lang="en-US" sz="1800" b="1" i="1" dirty="0">
-                <a:solidFill>
-                  <a:srgbClr val="FFFFFF"/>
-                </a:solidFill>
-                <a:latin typeface="Cambria" pitchFamily="34" charset="0"/>
-                <a:ea typeface="Cambria" pitchFamily="34" charset="-122"/>
-                <a:cs typeface="Cambria" pitchFamily="34" charset="-120"/>
-              </a:rPr>
-              <a:t>Thank you.</a:t>
-            </a:r>
-            <a:endParaRPr lang="en-US" sz="1800" dirty="0"/>
+            <a:endParaRPr lang="en-US" sz="2000" dirty="0"/>
           </a:p>
         </p:txBody>
       </p:sp>
@@ -35016,45 +34125,6 @@
               <a:t>39</a:t>
             </a:r>
             <a:endParaRPr lang="en-US" sz="1000" dirty="0"/>
-          </a:p>
-        </p:txBody>
-      </p:sp>
-      <p:sp>
-        <p:nvSpPr>
-          <p:cNvPr id="21" name="Text 14"/>
-          <p:cNvSpPr/>
-          <p:nvPr/>
-        </p:nvSpPr>
-        <p:spPr>
-          <a:xfrm>
-            <a:off x="548640" y="6400800"/>
-            <a:ext cx="6400800" cy="274320"/>
-          </a:xfrm>
-          <a:prstGeom prst="rect">
-            <a:avLst/>
-          </a:prstGeom>
-          <a:noFill/>
-          <a:ln/>
-        </p:spPr>
-        <p:txBody>
-          <a:bodyPr wrap="square" rtlCol="0" anchor="ctr"/>
-          <a:lstStyle/>
-          <a:p>
-            <a:pPr marL="0" indent="0">
-              <a:buNone/>
-            </a:pPr>
-            <a:r>
-              <a:rPr lang="en-US" sz="900" dirty="0">
-                <a:solidFill>
-                  <a:srgbClr val="8891BB"/>
-                </a:solidFill>
-                <a:latin typeface="Calibri" pitchFamily="34" charset="0"/>
-                <a:ea typeface="Calibri" pitchFamily="34" charset="-122"/>
-                <a:cs typeface="Calibri" pitchFamily="34" charset="-120"/>
-              </a:rPr>
-              <a:t>Ch. 3 — Managing the Information Systems Project</a:t>
-            </a:r>
-            <a:endParaRPr lang="en-US" sz="900" dirty="0"/>
           </a:p>
         </p:txBody>
       </p:sp>
@@ -35274,7 +34344,7 @@
               <a:buNone/>
             </a:pPr>
             <a:r>
-              <a:rPr lang="en-US" sz="1800" b="1" dirty="0">
+              <a:rPr lang="en-US" sz="2400" b="1" dirty="0">
                 <a:solidFill>
                   <a:srgbClr val="1E2761"/>
                 </a:solidFill>
@@ -35284,7 +34354,7 @@
               </a:rPr>
               <a:t>System Service Request (SSR)</a:t>
             </a:r>
-            <a:endParaRPr lang="en-US" sz="1800" dirty="0"/>
+            <a:endParaRPr lang="en-US" sz="2400" dirty="0"/>
           </a:p>
         </p:txBody>
       </p:sp>
@@ -35432,7 +34502,7 @@
               <a:buNone/>
             </a:pPr>
             <a:r>
-              <a:rPr lang="en-US" sz="1800" b="1" dirty="0">
+              <a:rPr lang="en-US" sz="2400" b="1" dirty="0">
                 <a:solidFill>
                   <a:srgbClr val="1E2761"/>
                 </a:solidFill>
@@ -35442,7 +34512,7 @@
               </a:rPr>
               <a:t>Feasibility Study</a:t>
             </a:r>
-            <a:endParaRPr lang="en-US" sz="1800" dirty="0"/>
+            <a:endParaRPr lang="en-US" sz="2400" dirty="0"/>
           </a:p>
         </p:txBody>
       </p:sp>
@@ -36987,7 +36057,7 @@
               <a:buNone/>
             </a:pPr>
             <a:r>
-              <a:rPr lang="en-US" sz="1800" b="1" dirty="0">
+              <a:rPr lang="en-US" sz="2400" b="1" dirty="0">
                 <a:solidFill>
                   <a:srgbClr val="1E2761"/>
                 </a:solidFill>
@@ -36997,7 +36067,7 @@
               </a:rPr>
               <a:t>Project</a:t>
             </a:r>
-            <a:endParaRPr lang="en-US" sz="1800" dirty="0"/>
+            <a:endParaRPr lang="en-US" sz="2400" dirty="0"/>
           </a:p>
         </p:txBody>
       </p:sp>
@@ -37145,7 +36215,7 @@
               <a:buNone/>
             </a:pPr>
             <a:r>
-              <a:rPr lang="en-US" sz="1800" b="1" dirty="0">
+              <a:rPr lang="en-US" sz="2400" b="1" dirty="0">
                 <a:solidFill>
                   <a:srgbClr val="1E2761"/>
                 </a:solidFill>
@@ -37155,7 +36225,7 @@
               </a:rPr>
               <a:t>Project Management</a:t>
             </a:r>
-            <a:endParaRPr lang="en-US" sz="1800" dirty="0"/>
+            <a:endParaRPr lang="en-US" sz="2400" dirty="0"/>
           </a:p>
         </p:txBody>
       </p:sp>
@@ -37327,7 +36397,7 @@
               <a:buNone/>
             </a:pPr>
             <a:r>
-              <a:rPr lang="en-US" sz="1800" b="1" dirty="0">
+              <a:rPr lang="en-US" sz="2400" b="1" dirty="0">
                 <a:solidFill>
                   <a:srgbClr val="1E2761"/>
                 </a:solidFill>
@@ -37337,7 +36407,7 @@
               </a:rPr>
               <a:t>Project Manager</a:t>
             </a:r>
-            <a:endParaRPr lang="en-US" sz="1800" dirty="0"/>
+            <a:endParaRPr lang="en-US" sz="2400" dirty="0"/>
           </a:p>
         </p:txBody>
       </p:sp>
@@ -37515,7 +36585,7 @@
               <a:buNone/>
             </a:pPr>
             <a:r>
-              <a:rPr lang="en-US" sz="1800" b="1" dirty="0">
+              <a:rPr lang="en-US" sz="2400" b="1" dirty="0">
                 <a:solidFill>
                   <a:srgbClr val="1E2761"/>
                 </a:solidFill>
@@ -37525,7 +36595,7 @@
               </a:rPr>
               <a:t>Deliverable</a:t>
             </a:r>
-            <a:endParaRPr lang="en-US" sz="1800" dirty="0"/>
+            <a:endParaRPr lang="en-US" sz="2400" dirty="0"/>
           </a:p>
         </p:txBody>
       </p:sp>
